--- a/Topic_C/Exam_Practice/TC-L08_Speaking_Workshop_Buildings_Services_Urban_Areas.pptx
+++ b/Topic_C/Exam_Practice/TC-L08_Speaking_Workshop_Buildings_Services_Urban_Areas.pptx
@@ -615,7 +615,11 @@
           <a:lstStyle/>
           <a:p>
             <a:r>
-              <a:rPr lang="en-US" dirty="0"/>
+              <a:rPr lang="ar-SA" dirty="0">
+                <a:latin typeface="Amiri" pitchFamily="2" charset="-78"/>
+                <a:ea typeface="Amiri" pitchFamily="2" charset="-78"/>
+                <a:cs typeface="Amiri" pitchFamily="2" charset="-78"/>
+              </a:rPr>
               <a:t>ROLE PLAY C (Develop) — a neighbourhood survey.
 SET-UP IN THE BREAKOUT ROOM: A = examiner (reads the left column ONLY — the questions, in order), B = candidate (sees the task column; Core may use the help column), C = observer (ticks the feedback checklist). 1 minute preparation, about 3 minutes speaking, 1 minute feedback, then rotate.
 Task ! is the unexpected question: in the exam the candidate has not seen it — the examiner should read it without warning.
@@ -707,7 +711,11 @@
           <a:lstStyle/>
           <a:p>
             <a:r>
-              <a:rPr lang="en-US" dirty="0"/>
+              <a:rPr lang="ar-SA" dirty="0">
+                <a:latin typeface="Amiri" pitchFamily="2" charset="-78"/>
+                <a:ea typeface="Amiri" pitchFamily="2" charset="-78"/>
+                <a:cs typeface="Amiri" pitchFamily="2" charset="-78"/>
+              </a:rPr>
               <a:t>ROLE PLAY D (Stretch) — a planning debate.
 SET-UP IN THE BREAKOUT ROOM: A = examiner (reads the left column ONLY — the questions, in order), B = candidate (sees the task column; Core may use the help column), C = observer (ticks the feedback checklist). 1 minute preparation, about 3 minutes speaking, 1 minute feedback, then rotate.
 Task ! is the unexpected question: in the exam the candidate has not seen it — the examiner should read it without warning.
@@ -1243,7 +1251,11 @@
           <a:lstStyle/>
           <a:p>
             <a:r>
-              <a:rPr lang="en-US" dirty="0"/>
+              <a:rPr lang="ar-SA" dirty="0">
+                <a:latin typeface="Amiri" pitchFamily="2" charset="-78"/>
+                <a:ea typeface="Amiri" pitchFamily="2" charset="-78"/>
+                <a:cs typeface="Amiri" pitchFamily="2" charset="-78"/>
+              </a:rPr>
               <a:t>TOPIC CONVERSATION — Core. Examiner asks the questions in order and may add “لِمَاذَا؟ / هَلْ يُمْكِنُ أَنْ تَشْرَحَ أَكْثَرَ؟” to push for more. Candidate aims for one full sentence per question.
 </a:t>
             </a:r>
@@ -1332,7 +1344,11 @@
           <a:lstStyle/>
           <a:p>
             <a:r>
-              <a:rPr lang="en-US" dirty="0"/>
+              <a:rPr lang="ar-SA" dirty="0">
+                <a:latin typeface="Amiri" pitchFamily="2" charset="-78"/>
+                <a:ea typeface="Amiri" pitchFamily="2" charset="-78"/>
+                <a:cs typeface="Amiri" pitchFamily="2" charset="-78"/>
+              </a:rPr>
               <a:t>TOPIC CONVERSATION — Develop. Examiner asks the questions in order and may add “لِمَاذَا؟ / هَلْ يُمْكِنُ أَنْ تَشْرَحَ أَكْثَرَ؟” to push for more. Candidate aims for two or three sentences, with a comparison and a past detail.
 </a:t>
             </a:r>
@@ -1421,7 +1437,11 @@
           <a:lstStyle/>
           <a:p>
             <a:r>
-              <a:rPr lang="en-US" dirty="0"/>
+              <a:rPr lang="ar-SA" dirty="0">
+                <a:latin typeface="Amiri" pitchFamily="2" charset="-78"/>
+                <a:ea typeface="Amiri" pitchFamily="2" charset="-78"/>
+                <a:cs typeface="Amiri" pitchFamily="2" charset="-78"/>
+              </a:rPr>
               <a:t>TOPIC CONVERSATION — Stretch. Examiner asks the questions in order and may add “لِمَاذَا؟ / هَلْ يُمْكِنُ أَنْ تَشْرَحَ أَكْثَرَ؟” to push for more. Candidate aims for a developed answer: opinion, balance, concession and a conditional.
 </a:t>
             </a:r>
@@ -1510,7 +1530,11 @@
           <a:lstStyle/>
           <a:p>
             <a:r>
-              <a:rPr lang="en-US" dirty="0"/>
+              <a:rPr lang="ar-SA" dirty="0">
+                <a:latin typeface="Amiri" pitchFamily="2" charset="-78"/>
+                <a:ea typeface="Amiri" pitchFamily="2" charset="-78"/>
+                <a:cs typeface="Amiri" pitchFamily="2" charset="-78"/>
+              </a:rPr>
               <a:t>WELCOME (1 min) — while students join.
 • Greet each student by name as they arrive: السَّلَامُ عَلَيْكُمْ. Take the register (Pastoral Tracker: attendance 0/1).
 • 2-MINUTE CHECK-IN (SEND training): a private chat to any student who seemed unsettled last lesson — “Are you okay today? 👍 / 👎”.
@@ -2224,7 +2248,11 @@
           <a:lstStyle/>
           <a:p>
             <a:r>
-              <a:rPr lang="en-US" dirty="0"/>
+              <a:rPr lang="ar-SA" dirty="0">
+                <a:latin typeface="Amiri" pitchFamily="2" charset="-78"/>
+                <a:ea typeface="Amiri" pitchFamily="2" charset="-78"/>
+                <a:cs typeface="Amiri" pitchFamily="2" charset="-78"/>
+              </a:rPr>
               <a:t>TEACH (3 min). Role play = precise and complete; conversation = develop. Choral repetition of the repair phrases. To a girl: تُعِيدِي.</a:t>
             </a:r>
             <a:endParaRPr lang="en-US" dirty="0"/>
@@ -2312,7 +2340,11 @@
           <a:lstStyle/>
           <a:p>
             <a:r>
-              <a:rPr lang="en-US" dirty="0"/>
+              <a:rPr lang="ar-SA" dirty="0">
+                <a:latin typeface="Amiri" pitchFamily="2" charset="-78"/>
+                <a:ea typeface="Amiri" pitchFamily="2" charset="-78"/>
+                <a:cs typeface="Amiri" pitchFamily="2" charset="-78"/>
+              </a:rPr>
               <a:t>LANGUAGE BANK (2 min) — يُوجَدُ before a masculine noun, تُوجَدُ before a feminine noun: يُوجَدُ مُسْتَشْفًى · تُوجَدُ مَكْتَبَةٌ. Non-human plurals → تُوجَدُ مَبَانٍ عَالِيَةٌ. مَبْنًى and مُسْتَشْفًى end in alif: المَبْنَى · المُسْتَشْفَى.</a:t>
             </a:r>
             <a:endParaRPr lang="en-US" dirty="0"/>
@@ -2400,7 +2432,11 @@
           <a:lstStyle/>
           <a:p>
             <a:r>
-              <a:rPr lang="en-US" dirty="0"/>
+              <a:rPr lang="ar-SA" dirty="0">
+                <a:latin typeface="Amiri" pitchFamily="2" charset="-78"/>
+                <a:ea typeface="Amiri" pitchFamily="2" charset="-78"/>
+                <a:cs typeface="Amiri" pitchFamily="2" charset="-78"/>
+              </a:rPr>
               <a:t>LANGUAGE BANK (2 min) — locatives take the genitive: مُقَابِلَ المَسْجِدِ · بِجَانِبِ البَنْكِ · بَيْنَ المَدْرَسَةِ وَالحَدِيقَةِ. Comparatives: المَدِينَةُ أَكْثَرُ ازْدِحَامًا مِنَ القَرْيَةِ. Materials: البَيْتُ مَبْنِيٌّ مِنَ الحَجَرِ.</a:t>
             </a:r>
             <a:endParaRPr lang="en-US" dirty="0"/>
@@ -2576,7 +2612,11 @@
           <a:lstStyle/>
           <a:p>
             <a:r>
-              <a:rPr lang="en-US" dirty="0"/>
+              <a:rPr lang="ar-SA" dirty="0">
+                <a:latin typeface="Amiri" pitchFamily="2" charset="-78"/>
+                <a:ea typeface="Amiri" pitchFamily="2" charset="-78"/>
+                <a:cs typeface="Amiri" pitchFamily="2" charset="-78"/>
+              </a:rPr>
               <a:t>ROLE PLAY A (Core) — in the street.
 SET-UP IN THE BREAKOUT ROOM: A = examiner (reads the left column ONLY — the questions, in order), B = candidate (sees the task column; Core may use the help column), C = observer (ticks the feedback checklist). 1 minute preparation, about 3 minutes speaking, 1 minute feedback, then rotate.
 Task ! is the unexpected question: in the exam the candidate has not seen it — the examiner should read it without warning.
@@ -2668,7 +2708,11 @@
           <a:lstStyle/>
           <a:p>
             <a:r>
-              <a:rPr lang="en-US" dirty="0"/>
+              <a:rPr lang="ar-SA" dirty="0">
+                <a:latin typeface="Amiri" pitchFamily="2" charset="-78"/>
+                <a:ea typeface="Amiri" pitchFamily="2" charset="-78"/>
+                <a:cs typeface="Amiri" pitchFamily="2" charset="-78"/>
+              </a:rPr>
               <a:t>ROLE PLAY B (Core+) — a tourist office.
 SET-UP IN THE BREAKOUT ROOM: A = examiner (reads the left column ONLY — the questions, in order), B = candidate (sees the task column; Core may use the help column), C = observer (ticks the feedback checklist). 1 minute preparation, about 3 minutes speaking, 1 minute feedback, then rotate.
 Task ! is the unexpected question: in the exam the candidate has not seen it — the examiner should read it without warning.
@@ -3156,6 +3200,7 @@
                   <a:srgbClr val="D4AF37"/>
                 </a:solidFill>
                 <a:latin typeface="Amiri" pitchFamily="2" charset="-78"/>
+                <a:ea typeface="Amiri" pitchFamily="2" charset="-78"/>
                 <a:cs typeface="Amiri" pitchFamily="2" charset="-78"/>
               </a:rPr>
               <a:t>م</a:t>
@@ -3362,6 +3407,7 @@
                   <a:srgbClr val="D4AF37"/>
                 </a:solidFill>
                 <a:latin typeface="Amiri" pitchFamily="2" charset="-78"/>
+                <a:ea typeface="Amiri" pitchFamily="2" charset="-78"/>
                 <a:cs typeface="Amiri" pitchFamily="2" charset="-78"/>
               </a:rPr>
               <a:t>وَرْشَةُ التَّحَدُّثِ — المَدِينَةُ وَخِدْمَاتُهَا</a:t>
@@ -3413,6 +3459,7 @@
                   <a:srgbClr val="C6D2E6"/>
                 </a:solidFill>
                 <a:latin typeface="Amiri" pitchFamily="2" charset="-78"/>
+                <a:ea typeface="Amiri" pitchFamily="2" charset="-78"/>
                 <a:cs typeface="Amiri" pitchFamily="2" charset="-78"/>
               </a:rPr>
               <a:t>مُقَابِلَ</a:t>
@@ -3439,6 +3486,7 @@
                   <a:srgbClr val="C6D2E6"/>
                 </a:solidFill>
                 <a:latin typeface="Amiri" pitchFamily="2" charset="-78"/>
+                <a:ea typeface="Amiri" pitchFamily="2" charset="-78"/>
                 <a:cs typeface="Amiri" pitchFamily="2" charset="-78"/>
               </a:rPr>
               <a:t>بِجَانِبِ</a:t>
@@ -3465,6 +3513,7 @@
                   <a:srgbClr val="C6D2E6"/>
                 </a:solidFill>
                 <a:latin typeface="Amiri" pitchFamily="2" charset="-78"/>
+                <a:ea typeface="Amiri" pitchFamily="2" charset="-78"/>
                 <a:cs typeface="Amiri" pitchFamily="2" charset="-78"/>
               </a:rPr>
               <a:t>بَيْنَ</a:t>
@@ -3491,6 +3540,7 @@
                   <a:srgbClr val="C6D2E6"/>
                 </a:solidFill>
                 <a:latin typeface="Amiri" pitchFamily="2" charset="-78"/>
+                <a:ea typeface="Amiri" pitchFamily="2" charset="-78"/>
                 <a:cs typeface="Amiri" pitchFamily="2" charset="-78"/>
               </a:rPr>
               <a:t>يُوجَدُ</a:t>
@@ -3517,6 +3567,7 @@
                   <a:srgbClr val="C6D2E6"/>
                 </a:solidFill>
                 <a:latin typeface="Amiri" pitchFamily="2" charset="-78"/>
+                <a:ea typeface="Amiri" pitchFamily="2" charset="-78"/>
                 <a:cs typeface="Amiri" pitchFamily="2" charset="-78"/>
               </a:rPr>
               <a:t>تُوجَدُ</a:t>
@@ -3543,6 +3594,7 @@
                   <a:srgbClr val="C6D2E6"/>
                 </a:solidFill>
                 <a:latin typeface="Amiri" pitchFamily="2" charset="-78"/>
+                <a:ea typeface="Amiri" pitchFamily="2" charset="-78"/>
                 <a:cs typeface="Amiri" pitchFamily="2" charset="-78"/>
               </a:rPr>
               <a:t>مَبْنِيٌّ مِنْ</a:t>
@@ -3975,6 +4027,7 @@
                   <a:srgbClr val="D4AF37"/>
                 </a:solidFill>
                 <a:latin typeface="Amiri" pitchFamily="2" charset="-78"/>
+                <a:ea typeface="Amiri" pitchFamily="2" charset="-78"/>
                 <a:cs typeface="Amiri" pitchFamily="2" charset="-78"/>
               </a:rPr>
               <a:t>م</a:t>
@@ -4295,6 +4348,7 @@
                   <a:srgbClr val="8A6D1E"/>
                 </a:solidFill>
                 <a:latin typeface="Amiri" pitchFamily="2" charset="-78"/>
+                <a:ea typeface="Amiri" pitchFamily="2" charset="-78"/>
                 <a:cs typeface="Amiri" pitchFamily="2" charset="-78"/>
               </a:rPr>
               <a:t>اسْتِطْلَاعٌ عَنِ الحَيِّ</a:t>
@@ -4575,6 +4629,7 @@
                   <a:srgbClr val="1B3B6F"/>
                 </a:solidFill>
                 <a:latin typeface="Amiri" pitchFamily="2" charset="-78"/>
+                <a:ea typeface="Amiri" pitchFamily="2" charset="-78"/>
                 <a:cs typeface="Amiri" pitchFamily="2" charset="-78"/>
               </a:rPr>
               <a:t>فِي حَيِّي يُوجَدُ … وَتُوجَدُ … بِجَانِبِ …</a:t>
@@ -4651,6 +4706,7 @@
                   <a:srgbClr val="1B3B6F"/>
                 </a:solidFill>
                 <a:latin typeface="Amiri" pitchFamily="2" charset="-78"/>
+                <a:ea typeface="Amiri" pitchFamily="2" charset="-78"/>
                 <a:cs typeface="Amiri" pitchFamily="2" charset="-78"/>
               </a:rPr>
               <a:t>صِفْ لِي حَيَّكَ.</a:t>
@@ -4754,6 +4810,7 @@
                   <a:srgbClr val="1B3B6F"/>
                 </a:solidFill>
                 <a:latin typeface="Amiri" pitchFamily="2" charset="-78"/>
+                <a:ea typeface="Amiri" pitchFamily="2" charset="-78"/>
                 <a:cs typeface="Amiri" pitchFamily="2" charset="-78"/>
               </a:rPr>
               <a:t>لَا يُوجَدُ … لِذٰلِكَ …</a:t>
@@ -4830,6 +4887,7 @@
                   <a:srgbClr val="1B3B6F"/>
                 </a:solidFill>
                 <a:latin typeface="Amiri" pitchFamily="2" charset="-78"/>
+                <a:ea typeface="Amiri" pitchFamily="2" charset="-78"/>
                 <a:cs typeface="Amiri" pitchFamily="2" charset="-78"/>
               </a:rPr>
               <a:t>وَمَا الَّذِي يَنْقُصُهُ؟</a:t>
@@ -4933,6 +4991,7 @@
                   <a:srgbClr val="1B3B6F"/>
                 </a:solidFill>
                 <a:latin typeface="Amiri" pitchFamily="2" charset="-78"/>
+                <a:ea typeface="Amiri" pitchFamily="2" charset="-78"/>
                 <a:cs typeface="Amiri" pitchFamily="2" charset="-78"/>
               </a:rPr>
               <a:t>كَانَ هُنَاكَ … أَمَّا الآنَ فَقَدْ بُنِيَتْ …</a:t>
@@ -5009,6 +5068,7 @@
                   <a:srgbClr val="1B3B6F"/>
                 </a:solidFill>
                 <a:latin typeface="Amiri" pitchFamily="2" charset="-78"/>
+                <a:ea typeface="Amiri" pitchFamily="2" charset="-78"/>
                 <a:cs typeface="Amiri" pitchFamily="2" charset="-78"/>
               </a:rPr>
               <a:t>كَيْفَ كَانَ الحَيُّ قَبْلَ عَشْرِ سَنَوَاتٍ؟</a:t>
@@ -5112,6 +5172,7 @@
                   <a:srgbClr val="1B3B6F"/>
                 </a:solidFill>
                 <a:latin typeface="Amiri" pitchFamily="2" charset="-78"/>
+                <a:ea typeface="Amiri" pitchFamily="2" charset="-78"/>
                 <a:cs typeface="Amiri" pitchFamily="2" charset="-78"/>
               </a:rPr>
               <a:t>أُفَضِّلُ … لِأَنَّهَا أَ… وَأَ…</a:t>
@@ -5188,6 +5249,7 @@
                   <a:srgbClr val="1B3B6F"/>
                 </a:solidFill>
                 <a:latin typeface="Amiri" pitchFamily="2" charset="-78"/>
+                <a:ea typeface="Amiri" pitchFamily="2" charset="-78"/>
                 <a:cs typeface="Amiri" pitchFamily="2" charset="-78"/>
               </a:rPr>
               <a:t>هَلْ تُفَضِّلُ السَّكَنَ فِي المَدِينَةِ أَمْ فِي الرِّيفِ؟</a:t>
@@ -5291,6 +5353,7 @@
                   <a:srgbClr val="1B3B6F"/>
                 </a:solidFill>
                 <a:latin typeface="Amiri" pitchFamily="2" charset="-78"/>
+                <a:ea typeface="Amiri" pitchFamily="2" charset="-78"/>
                 <a:cs typeface="Amiri" pitchFamily="2" charset="-78"/>
               </a:rPr>
               <a:t>سَيُبْنَى … / سَتُفْتَحُ …</a:t>
@@ -5367,6 +5430,7 @@
                   <a:srgbClr val="1B3B6F"/>
                 </a:solidFill>
                 <a:latin typeface="Amiri" pitchFamily="2" charset="-78"/>
+                <a:ea typeface="Amiri" pitchFamily="2" charset="-78"/>
                 <a:cs typeface="Amiri" pitchFamily="2" charset="-78"/>
               </a:rPr>
               <a:t>مَاذَا سَيُبْنَى فِي حَيِّكُمْ قَرِيبًا؟</a:t>
@@ -5576,6 +5640,7 @@
                   <a:srgbClr val="D4AF37"/>
                 </a:solidFill>
                 <a:latin typeface="Amiri" pitchFamily="2" charset="-78"/>
+                <a:ea typeface="Amiri" pitchFamily="2" charset="-78"/>
                 <a:cs typeface="Amiri" pitchFamily="2" charset="-78"/>
               </a:rPr>
               <a:t>م</a:t>
@@ -5896,6 +5961,7 @@
                   <a:srgbClr val="8A6D1E"/>
                 </a:solidFill>
                 <a:latin typeface="Amiri" pitchFamily="2" charset="-78"/>
+                <a:ea typeface="Amiri" pitchFamily="2" charset="-78"/>
                 <a:cs typeface="Amiri" pitchFamily="2" charset="-78"/>
               </a:rPr>
               <a:t>مَرْكَزٌ تِجَارِيٌّ أَمْ حَدِيقَةٌ؟</a:t>
@@ -6176,6 +6242,7 @@
                   <a:srgbClr val="1B3B6F"/>
                 </a:solidFill>
                 <a:latin typeface="Amiri" pitchFamily="2" charset="-78"/>
+                <a:ea typeface="Amiri" pitchFamily="2" charset="-78"/>
                 <a:cs typeface="Amiri" pitchFamily="2" charset="-78"/>
               </a:rPr>
               <a:t>أُعَارِضُ … لِأَنَّ …</a:t>
@@ -6255,6 +6322,7 @@
                   <a:srgbClr val="1B3B6F"/>
                 </a:solidFill>
                 <a:latin typeface="Amiri" pitchFamily="2" charset="-78"/>
+                <a:ea typeface="Amiri" pitchFamily="2" charset="-78"/>
                 <a:cs typeface="Amiri" pitchFamily="2" charset="-78"/>
               </a:rPr>
               <a:t>تُرِيدُ البَلَدِيَّةُ أَنْ تَبْنِيَ مَرْكَزًا تِجَارِيًّا مَكَانَ الحَدِيقَةِ. مَا رَأْيُكَ؟</a:t>
@@ -6358,6 +6426,7 @@
                   <a:srgbClr val="1B3B6F"/>
                 </a:solidFill>
                 <a:latin typeface="Amiri" pitchFamily="2" charset="-78"/>
+                <a:ea typeface="Amiri" pitchFamily="2" charset="-78"/>
                 <a:cs typeface="Amiri" pitchFamily="2" charset="-78"/>
               </a:rPr>
               <a:t>صَحِيحٌ أَنَّ … غَيْرَ أَنَّ …</a:t>
@@ -6434,6 +6503,7 @@
                   <a:srgbClr val="1B3B6F"/>
                 </a:solidFill>
                 <a:latin typeface="Amiri" pitchFamily="2" charset="-78"/>
+                <a:ea typeface="Amiri" pitchFamily="2" charset="-78"/>
                 <a:cs typeface="Amiri" pitchFamily="2" charset="-78"/>
               </a:rPr>
               <a:t>لٰكِنَّ المَرْكَزَ سَيُوَفِّرُ مِئَاتِ الوَظَائِفِ.</a:t>
@@ -6537,6 +6607,7 @@
                   <a:srgbClr val="1B3B6F"/>
                 </a:solidFill>
                 <a:latin typeface="Amiri" pitchFamily="2" charset="-78"/>
+                <a:ea typeface="Amiri" pitchFamily="2" charset="-78"/>
                 <a:cs typeface="Amiri" pitchFamily="2" charset="-78"/>
               </a:rPr>
               <a:t>أَقْتَرِحُ أَنْ … لِكَيْ …</a:t>
@@ -6613,6 +6684,7 @@
                   <a:srgbClr val="1B3B6F"/>
                 </a:solidFill>
                 <a:latin typeface="Amiri" pitchFamily="2" charset="-78"/>
+                <a:ea typeface="Amiri" pitchFamily="2" charset="-78"/>
                 <a:cs typeface="Amiri" pitchFamily="2" charset="-78"/>
               </a:rPr>
               <a:t>وَمَاذَا تَقْتَرِحُ إِذَنْ؟</a:t>
@@ -6716,6 +6788,7 @@
                   <a:srgbClr val="1B3B6F"/>
                 </a:solidFill>
                 <a:latin typeface="Amiri" pitchFamily="2" charset="-78"/>
+                <a:ea typeface="Amiri" pitchFamily="2" charset="-78"/>
                 <a:cs typeface="Amiri" pitchFamily="2" charset="-78"/>
               </a:rPr>
               <a:t>نَعَمْ، فِي … حَيْثُ …</a:t>
@@ -6792,6 +6865,7 @@
                   <a:srgbClr val="1B3B6F"/>
                 </a:solidFill>
                 <a:latin typeface="Amiri" pitchFamily="2" charset="-78"/>
+                <a:ea typeface="Amiri" pitchFamily="2" charset="-78"/>
                 <a:cs typeface="Amiri" pitchFamily="2" charset="-78"/>
               </a:rPr>
               <a:t>هَلْ هُنَاكَ مِثَالٌ نَاجِحٌ عَلَى ذٰلِكَ؟</a:t>
@@ -6895,6 +6969,7 @@
                   <a:srgbClr val="1B3B6F"/>
                 </a:solidFill>
                 <a:latin typeface="Amiri" pitchFamily="2" charset="-78"/>
+                <a:ea typeface="Amiri" pitchFamily="2" charset="-78"/>
                 <a:cs typeface="Amiri" pitchFamily="2" charset="-78"/>
               </a:rPr>
               <a:t>لَوْ كُنْتُ رَئِيسَ البَلَدِيَّةِ، لَبَنَيْتُ …</a:t>
@@ -6971,6 +7046,7 @@
                   <a:srgbClr val="1B3B6F"/>
                 </a:solidFill>
                 <a:latin typeface="Amiri" pitchFamily="2" charset="-78"/>
+                <a:ea typeface="Amiri" pitchFamily="2" charset="-78"/>
                 <a:cs typeface="Amiri" pitchFamily="2" charset="-78"/>
               </a:rPr>
               <a:t>لَوْ كُنْتَ رَئِيسَ البَلَدِيَّةِ، مَاذَا تَبْنِي أَوَّلًا؟</a:t>
@@ -7180,6 +7256,7 @@
                   <a:srgbClr val="D4AF37"/>
                 </a:solidFill>
                 <a:latin typeface="Amiri" pitchFamily="2" charset="-78"/>
+                <a:ea typeface="Amiri" pitchFamily="2" charset="-78"/>
                 <a:cs typeface="Amiri" pitchFamily="2" charset="-78"/>
               </a:rPr>
               <a:t>م</a:t>
@@ -7500,6 +7577,7 @@
                   <a:srgbClr val="8A6D1E"/>
                 </a:solidFill>
                 <a:latin typeface="Amiri" pitchFamily="2" charset="-78"/>
+                <a:ea typeface="Amiri" pitchFamily="2" charset="-78"/>
                 <a:cs typeface="Amiri" pitchFamily="2" charset="-78"/>
               </a:rPr>
               <a:t>وَرَقَةُ المُلَاحِظِ</a:t>
@@ -8970,6 +9048,7 @@
                   <a:srgbClr val="D4AF37"/>
                 </a:solidFill>
                 <a:latin typeface="Amiri" pitchFamily="2" charset="-78"/>
+                <a:ea typeface="Amiri" pitchFamily="2" charset="-78"/>
                 <a:cs typeface="Amiri" pitchFamily="2" charset="-78"/>
               </a:rPr>
               <a:t>م</a:t>
@@ -9290,6 +9369,7 @@
                   <a:srgbClr val="8A6D1E"/>
                 </a:solidFill>
                 <a:latin typeface="Amiri" pitchFamily="2" charset="-78"/>
+                <a:ea typeface="Amiri" pitchFamily="2" charset="-78"/>
                 <a:cs typeface="Amiri" pitchFamily="2" charset="-78"/>
               </a:rPr>
               <a:t>نَمُوذَجُ الإِجَابَةِ</a:t>
@@ -9532,6 +9612,7 @@
                   <a:srgbClr val="1B3B6F"/>
                 </a:solidFill>
                 <a:latin typeface="Amiri" pitchFamily="2" charset="-78"/>
+                <a:ea typeface="Amiri" pitchFamily="2" charset="-78"/>
                 <a:cs typeface="Amiri" pitchFamily="2" charset="-78"/>
               </a:rPr>
               <a:t>مِنْ فَضْلِكَ، أَيْنَ المَتْحَفُ؟</a:t>
@@ -9608,6 +9689,7 @@
                   <a:srgbClr val="1B3B6F"/>
                 </a:solidFill>
                 <a:latin typeface="Amiri" pitchFamily="2" charset="-78"/>
+                <a:ea typeface="Amiri" pitchFamily="2" charset="-78"/>
                 <a:cs typeface="Amiri" pitchFamily="2" charset="-78"/>
               </a:rPr>
               <a:t>نَعَمْ؟ هَلْ أُسَاعِدُكَ؟</a:t>
@@ -9711,6 +9793,7 @@
                   <a:srgbClr val="1B3B6F"/>
                 </a:solidFill>
                 <a:latin typeface="Amiri" pitchFamily="2" charset="-78"/>
+                <a:ea typeface="Amiri" pitchFamily="2" charset="-78"/>
                 <a:cs typeface="Amiri" pitchFamily="2" charset="-78"/>
               </a:rPr>
               <a:t>هَلْ هُوَ بَعِيدٌ عَنْ هُنَا؟</a:t>
@@ -9787,6 +9870,7 @@
                   <a:srgbClr val="1B3B6F"/>
                 </a:solidFill>
                 <a:latin typeface="Amiri" pitchFamily="2" charset="-78"/>
+                <a:ea typeface="Amiri" pitchFamily="2" charset="-78"/>
                 <a:cs typeface="Amiri" pitchFamily="2" charset="-78"/>
               </a:rPr>
               <a:t>المَتْحَفُ مُقَابِلَ المَحَطَّةِ.</a:t>
@@ -9890,6 +9974,7 @@
                   <a:srgbClr val="1B3B6F"/>
                 </a:solidFill>
                 <a:latin typeface="Amiri" pitchFamily="2" charset="-78"/>
+                <a:ea typeface="Amiri" pitchFamily="2" charset="-78"/>
                 <a:cs typeface="Amiri" pitchFamily="2" charset="-78"/>
               </a:rPr>
               <a:t>هَلْ يُوجَدُ مَقْهًى قُرْبَهُ؟</a:t>
@@ -9966,6 +10051,7 @@
                   <a:srgbClr val="1B3B6F"/>
                 </a:solidFill>
                 <a:latin typeface="Amiri" pitchFamily="2" charset="-78"/>
+                <a:ea typeface="Amiri" pitchFamily="2" charset="-78"/>
                 <a:cs typeface="Amiri" pitchFamily="2" charset="-78"/>
               </a:rPr>
               <a:t>لَا، عَشْرُ دَقَائِقَ مَشْيًا.</a:t>
@@ -10069,6 +10155,7 @@
                   <a:srgbClr val="1B3B6F"/>
                 </a:solidFill>
                 <a:latin typeface="Amiri" pitchFamily="2" charset="-78"/>
+                <a:ea typeface="Amiri" pitchFamily="2" charset="-78"/>
                 <a:cs typeface="Amiri" pitchFamily="2" charset="-78"/>
               </a:rPr>
               <a:t>شُكْرًا جَزِيلًا، أَنَا مِنْ مَانْشِسْتَرَ.</a:t>
@@ -10145,6 +10232,7 @@
                   <a:srgbClr val="1B3B6F"/>
                 </a:solidFill>
                 <a:latin typeface="Amiri" pitchFamily="2" charset="-78"/>
+                <a:ea typeface="Amiri" pitchFamily="2" charset="-78"/>
                 <a:cs typeface="Amiri" pitchFamily="2" charset="-78"/>
               </a:rPr>
               <a:t>نَعَمْ، بِجَانِبِ المَتْحَفِ.</a:t>
@@ -10248,6 +10336,7 @@
                   <a:srgbClr val="1B3B6F"/>
                 </a:solidFill>
                 <a:latin typeface="Amiri" pitchFamily="2" charset="-78"/>
+                <a:ea typeface="Amiri" pitchFamily="2" charset="-78"/>
                 <a:cs typeface="Amiri" pitchFamily="2" charset="-78"/>
               </a:rPr>
               <a:t>نَعَمْ، هِيَ جَمِيلَةٌ وَنَظِيفَةٌ.</a:t>
@@ -10324,6 +10413,7 @@
                   <a:srgbClr val="1B3B6F"/>
                 </a:solidFill>
                 <a:latin typeface="Amiri" pitchFamily="2" charset="-78"/>
+                <a:ea typeface="Amiri" pitchFamily="2" charset="-78"/>
                 <a:cs typeface="Amiri" pitchFamily="2" charset="-78"/>
               </a:rPr>
               <a:t>هَلْ تُعْجِبُكَ مَدِينَتُنَا؟</a:t>
@@ -10533,6 +10623,7 @@
                   <a:srgbClr val="D4AF37"/>
                 </a:solidFill>
                 <a:latin typeface="Amiri" pitchFamily="2" charset="-78"/>
+                <a:ea typeface="Amiri" pitchFamily="2" charset="-78"/>
                 <a:cs typeface="Amiri" pitchFamily="2" charset="-78"/>
               </a:rPr>
               <a:t>م</a:t>
@@ -10853,6 +10944,7 @@
                   <a:srgbClr val="8A6D1E"/>
                 </a:solidFill>
                 <a:latin typeface="Amiri" pitchFamily="2" charset="-78"/>
+                <a:ea typeface="Amiri" pitchFamily="2" charset="-78"/>
                 <a:cs typeface="Amiri" pitchFamily="2" charset="-78"/>
               </a:rPr>
               <a:t>نَمُوذَجُ الإِجَابَةِ</a:t>
@@ -11095,6 +11187,7 @@
                   <a:srgbClr val="1B3B6F"/>
                 </a:solidFill>
                 <a:latin typeface="Amiri" pitchFamily="2" charset="-78"/>
+                <a:ea typeface="Amiri" pitchFamily="2" charset="-78"/>
                 <a:cs typeface="Amiri" pitchFamily="2" charset="-78"/>
               </a:rPr>
               <a:t>أُحِبُّ أَنْ أَزُورَ القَلْعَةَ وَالسُّوقَ القَدِيمَ.</a:t>
@@ -11171,6 +11264,7 @@
                   <a:srgbClr val="1B3B6F"/>
                 </a:solidFill>
                 <a:latin typeface="Amiri" pitchFamily="2" charset="-78"/>
+                <a:ea typeface="Amiri" pitchFamily="2" charset="-78"/>
                 <a:cs typeface="Amiri" pitchFamily="2" charset="-78"/>
               </a:rPr>
               <a:t>أَهْلًا وَسَهْلًا! مَاذَا تُحِبُّ أَنْ تَزُورَ؟</a:t>
@@ -11274,6 +11368,7 @@
                   <a:srgbClr val="1B3B6F"/>
                 </a:solidFill>
                 <a:latin typeface="Amiri" pitchFamily="2" charset="-78"/>
+                <a:ea typeface="Amiri" pitchFamily="2" charset="-78"/>
                 <a:cs typeface="Amiri" pitchFamily="2" charset="-78"/>
               </a:rPr>
               <a:t>كَيْفَ أَصِلُ إِلَيْهَا بِالحَافِلَةِ؟</a:t>
@@ -11350,6 +11445,7 @@
                   <a:srgbClr val="1B3B6F"/>
                 </a:solidFill>
                 <a:latin typeface="Amiri" pitchFamily="2" charset="-78"/>
+                <a:ea typeface="Amiri" pitchFamily="2" charset="-78"/>
                 <a:cs typeface="Amiri" pitchFamily="2" charset="-78"/>
               </a:rPr>
               <a:t>القَلْعَةُ فِي وَسَطِ المَدِينَةِ.</a:t>
@@ -11453,6 +11549,7 @@
                   <a:srgbClr val="1B3B6F"/>
                 </a:solidFill>
                 <a:latin typeface="Amiri" pitchFamily="2" charset="-78"/>
+                <a:ea typeface="Amiri" pitchFamily="2" charset="-78"/>
                 <a:cs typeface="Amiri" pitchFamily="2" charset="-78"/>
               </a:rPr>
               <a:t>مَتَى تُفْتَحُ القَلْعَةُ، وَمَتَى تُغْلَقُ؟</a:t>
@@ -11529,6 +11626,7 @@
                   <a:srgbClr val="1B3B6F"/>
                 </a:solidFill>
                 <a:latin typeface="Amiri" pitchFamily="2" charset="-78"/>
+                <a:ea typeface="Amiri" pitchFamily="2" charset="-78"/>
                 <a:cs typeface="Amiri" pitchFamily="2" charset="-78"/>
               </a:rPr>
               <a:t>الحَافِلَةُ رَقْمُ خَمْسَةٍ، أَمَامَ المَكْتَبِ.</a:t>
@@ -11632,6 +11730,7 @@
                   <a:srgbClr val="1B3B6F"/>
                 </a:solidFill>
                 <a:latin typeface="Amiri" pitchFamily="2" charset="-78"/>
+                <a:ea typeface="Amiri" pitchFamily="2" charset="-78"/>
                 <a:cs typeface="Amiri" pitchFamily="2" charset="-78"/>
               </a:rPr>
               <a:t>رَائِعٌ! مِمَّ هِيَ مَبْنِيَّةٌ؟</a:t>
@@ -11711,6 +11810,7 @@
                   <a:srgbClr val="1B3B6F"/>
                 </a:solidFill>
                 <a:latin typeface="Amiri" pitchFamily="2" charset="-78"/>
+                <a:ea typeface="Amiri" pitchFamily="2" charset="-78"/>
                 <a:cs typeface="Amiri" pitchFamily="2" charset="-78"/>
               </a:rPr>
               <a:t>مِنَ التَّاسِعَةِ إِلَى الخَامِسَةِ. وَهِيَ مَبْنِيَّةٌ مُنْذُ أَلْفِ سَنَةٍ!</a:t>
@@ -11814,6 +11914,7 @@
                   <a:srgbClr val="1B3B6F"/>
                 </a:solidFill>
                 <a:latin typeface="Amiri" pitchFamily="2" charset="-78"/>
+                <a:ea typeface="Amiri" pitchFamily="2" charset="-78"/>
                 <a:cs typeface="Amiri" pitchFamily="2" charset="-78"/>
               </a:rPr>
               <a:t>نَعَمْ، مَدِينَتِي أَكْبَرُ، لٰكِنَّهَا أَكْثَرُ ازْدِحَامًا مِنْ مَدِينَتِكُمْ.</a:t>
@@ -11890,6 +11991,7 @@
                   <a:srgbClr val="1B3B6F"/>
                 </a:solidFill>
                 <a:latin typeface="Amiri" pitchFamily="2" charset="-78"/>
+                <a:ea typeface="Amiri" pitchFamily="2" charset="-78"/>
                 <a:cs typeface="Amiri" pitchFamily="2" charset="-78"/>
               </a:rPr>
               <a:t>هَلْ مَدِينَتُكَ أَكْبَرُ مِنْ مَدِينَتِنَا؟</a:t>
@@ -12099,6 +12201,7 @@
                   <a:srgbClr val="D4AF37"/>
                 </a:solidFill>
                 <a:latin typeface="Amiri" pitchFamily="2" charset="-78"/>
+                <a:ea typeface="Amiri" pitchFamily="2" charset="-78"/>
                 <a:cs typeface="Amiri" pitchFamily="2" charset="-78"/>
               </a:rPr>
               <a:t>م</a:t>
@@ -12419,6 +12522,7 @@
                   <a:srgbClr val="8A6D1E"/>
                 </a:solidFill>
                 <a:latin typeface="Amiri" pitchFamily="2" charset="-78"/>
+                <a:ea typeface="Amiri" pitchFamily="2" charset="-78"/>
                 <a:cs typeface="Amiri" pitchFamily="2" charset="-78"/>
               </a:rPr>
               <a:t>نَمُوذَجُ الإِجَابَةِ</a:t>
@@ -12661,6 +12765,7 @@
                   <a:srgbClr val="1B3B6F"/>
                 </a:solidFill>
                 <a:latin typeface="Amiri" pitchFamily="2" charset="-78"/>
+                <a:ea typeface="Amiri" pitchFamily="2" charset="-78"/>
                 <a:cs typeface="Amiri" pitchFamily="2" charset="-78"/>
               </a:rPr>
               <a:t>حَيِّي هَادِئٌ؛ فِيهِ تُوجَدُ مَدْرَسَةٌ ابْتِدَائِيَّةٌ، وَبِجَانِبِهَا حَدِيقَةٌ صَغِيرَةٌ وَمَرْكَزٌ صِحِّيٌّ.</a:t>
@@ -12737,6 +12842,7 @@
                   <a:srgbClr val="1B3B6F"/>
                 </a:solidFill>
                 <a:latin typeface="Amiri" pitchFamily="2" charset="-78"/>
+                <a:ea typeface="Amiri" pitchFamily="2" charset="-78"/>
                 <a:cs typeface="Amiri" pitchFamily="2" charset="-78"/>
               </a:rPr>
               <a:t>صِفْ لِي حَيَّكَ.</a:t>
@@ -12840,6 +12946,7 @@
                   <a:srgbClr val="1B3B6F"/>
                 </a:solidFill>
                 <a:latin typeface="Amiri" pitchFamily="2" charset="-78"/>
+                <a:ea typeface="Amiri" pitchFamily="2" charset="-78"/>
                 <a:cs typeface="Amiri" pitchFamily="2" charset="-78"/>
               </a:rPr>
               <a:t>لَا يُوجَدُ مَرْكَزٌ لِلشَّبَابِ، لِذٰلِكَ يَقْضِي المُرَاهِقُونَ وَقْتَهُمْ فِي الشَّارِعِ.</a:t>
@@ -12916,6 +13023,7 @@
                   <a:srgbClr val="1B3B6F"/>
                 </a:solidFill>
                 <a:latin typeface="Amiri" pitchFamily="2" charset="-78"/>
+                <a:ea typeface="Amiri" pitchFamily="2" charset="-78"/>
                 <a:cs typeface="Amiri" pitchFamily="2" charset="-78"/>
               </a:rPr>
               <a:t>وَمَا الَّذِي يَنْقُصُهُ؟</a:t>
@@ -13019,6 +13127,7 @@
                   <a:srgbClr val="1B3B6F"/>
                 </a:solidFill>
                 <a:latin typeface="Amiri" pitchFamily="2" charset="-78"/>
+                <a:ea typeface="Amiri" pitchFamily="2" charset="-78"/>
                 <a:cs typeface="Amiri" pitchFamily="2" charset="-78"/>
               </a:rPr>
               <a:t>كَانَ هُنَاكَ مَصْنَعٌ قَدِيمٌ، أَمَّا الآنَ فَقَدْ بُنِيَتْ مَكَانَهُ شُقَقٌ حَدِيثَةٌ.</a:t>
@@ -13095,6 +13204,7 @@
                   <a:srgbClr val="1B3B6F"/>
                 </a:solidFill>
                 <a:latin typeface="Amiri" pitchFamily="2" charset="-78"/>
+                <a:ea typeface="Amiri" pitchFamily="2" charset="-78"/>
                 <a:cs typeface="Amiri" pitchFamily="2" charset="-78"/>
               </a:rPr>
               <a:t>كَيْفَ كَانَ الحَيُّ قَبْلَ عَشْرِ سَنَوَاتٍ؟</a:t>
@@ -13198,6 +13308,7 @@
                   <a:srgbClr val="1B3B6F"/>
                 </a:solidFill>
                 <a:latin typeface="Amiri" pitchFamily="2" charset="-78"/>
+                <a:ea typeface="Amiri" pitchFamily="2" charset="-78"/>
                 <a:cs typeface="Amiri" pitchFamily="2" charset="-78"/>
               </a:rPr>
               <a:t>أُفَضِّلُ المَدِينَةَ، لِأَنَّ الخِدْمَاتِ فِيهَا أَكْثَرُ، وَالمُوَاصَلَاتِ أَسْرَعُ، مَعَ أَنَّ الرِّيفَ أَهْدَأُ.</a:t>
@@ -13274,6 +13385,7 @@
                   <a:srgbClr val="1B3B6F"/>
                 </a:solidFill>
                 <a:latin typeface="Amiri" pitchFamily="2" charset="-78"/>
+                <a:ea typeface="Amiri" pitchFamily="2" charset="-78"/>
                 <a:cs typeface="Amiri" pitchFamily="2" charset="-78"/>
               </a:rPr>
               <a:t>هَلْ تُفَضِّلُ السَّكَنَ فِي المَدِينَةِ أَمْ فِي الرِّيفِ؟</a:t>
@@ -13377,6 +13489,7 @@
                   <a:srgbClr val="1B3B6F"/>
                 </a:solidFill>
                 <a:latin typeface="Amiri" pitchFamily="2" charset="-78"/>
+                <a:ea typeface="Amiri" pitchFamily="2" charset="-78"/>
                 <a:cs typeface="Amiri" pitchFamily="2" charset="-78"/>
               </a:rPr>
               <a:t>سَتُفْتَحُ مَكْتَبَةٌ عَامَّةٌ جَدِيدَةٌ مُقَابِلَ المَحَطَّةِ فِي الصَّيْفِ القَادِمِ.</a:t>
@@ -13453,6 +13566,7 @@
                   <a:srgbClr val="1B3B6F"/>
                 </a:solidFill>
                 <a:latin typeface="Amiri" pitchFamily="2" charset="-78"/>
+                <a:ea typeface="Amiri" pitchFamily="2" charset="-78"/>
                 <a:cs typeface="Amiri" pitchFamily="2" charset="-78"/>
               </a:rPr>
               <a:t>مَاذَا سَيُبْنَى فِي حَيِّكُمْ قَرِيبًا؟</a:t>
@@ -13662,6 +13776,7 @@
                   <a:srgbClr val="D4AF37"/>
                 </a:solidFill>
                 <a:latin typeface="Amiri" pitchFamily="2" charset="-78"/>
+                <a:ea typeface="Amiri" pitchFamily="2" charset="-78"/>
                 <a:cs typeface="Amiri" pitchFamily="2" charset="-78"/>
               </a:rPr>
               <a:t>م</a:t>
@@ -13982,6 +14097,7 @@
                   <a:srgbClr val="8A6D1E"/>
                 </a:solidFill>
                 <a:latin typeface="Amiri" pitchFamily="2" charset="-78"/>
+                <a:ea typeface="Amiri" pitchFamily="2" charset="-78"/>
                 <a:cs typeface="Amiri" pitchFamily="2" charset="-78"/>
               </a:rPr>
               <a:t>نَمُوذَجُ الإِجَابَةِ</a:t>
@@ -14224,6 +14340,7 @@
                   <a:srgbClr val="1B3B6F"/>
                 </a:solidFill>
                 <a:latin typeface="Amiri" pitchFamily="2" charset="-78"/>
+                <a:ea typeface="Amiri" pitchFamily="2" charset="-78"/>
                 <a:cs typeface="Amiri" pitchFamily="2" charset="-78"/>
               </a:rPr>
               <a:t>أُعَارِضُ ذٰلِكَ بِشِدَّةٍ، لِأَنَّ الحَدِيقَةَ هِيَ المَسَاحَةُ الخَضْرَاءُ الوَحِيدَةُ الَّتِي بَقِيَتْ فِي وَسَطِ المَدِينَةِ.</a:t>
@@ -14303,6 +14420,7 @@
                   <a:srgbClr val="1B3B6F"/>
                 </a:solidFill>
                 <a:latin typeface="Amiri" pitchFamily="2" charset="-78"/>
+                <a:ea typeface="Amiri" pitchFamily="2" charset="-78"/>
                 <a:cs typeface="Amiri" pitchFamily="2" charset="-78"/>
               </a:rPr>
               <a:t>تُرِيدُ البَلَدِيَّةُ أَنْ تَبْنِيَ مَرْكَزًا تِجَارِيًّا مَكَانَ الحَدِيقَةِ. مَا رَأْيُكَ؟</a:t>
@@ -14406,6 +14524,7 @@
                   <a:srgbClr val="1B3B6F"/>
                 </a:solidFill>
                 <a:latin typeface="Amiri" pitchFamily="2" charset="-78"/>
+                <a:ea typeface="Amiri" pitchFamily="2" charset="-78"/>
                 <a:cs typeface="Amiri" pitchFamily="2" charset="-78"/>
               </a:rPr>
               <a:t>صَحِيحٌ أَنَّهُ سَيُوَفِّرُ وَظَائِفَ، غَيْرَ أَنَّ فِي المَدِينَةِ ثَلَاثَةَ مَرَاكِزَ تِجَارِيَّةٍ، وَنِصْفُ مَحَلَّاتِهَا مُغْلَقٌ أَصْلًا.</a:t>
@@ -14482,6 +14601,7 @@
                   <a:srgbClr val="1B3B6F"/>
                 </a:solidFill>
                 <a:latin typeface="Amiri" pitchFamily="2" charset="-78"/>
+                <a:ea typeface="Amiri" pitchFamily="2" charset="-78"/>
                 <a:cs typeface="Amiri" pitchFamily="2" charset="-78"/>
               </a:rPr>
               <a:t>لٰكِنَّ المَرْكَزَ سَيُوَفِّرُ مِئَاتِ الوَظَائِفِ.</a:t>
@@ -14585,6 +14705,7 @@
                   <a:srgbClr val="1B3B6F"/>
                 </a:solidFill>
                 <a:latin typeface="Amiri" pitchFamily="2" charset="-78"/>
+                <a:ea typeface="Amiri" pitchFamily="2" charset="-78"/>
                 <a:cs typeface="Amiri" pitchFamily="2" charset="-78"/>
               </a:rPr>
               <a:t>أَقْتَرِحُ أَنْ تُطَوَّرَ الحَدِيقَةُ، فَتُبْنَى فِيهَا مَلَاعِبُ وَمَقْهًى صَغِيرٌ، لِكَيْ تُوَفِّرَ وَظَائِفَ وَتَبْقَى خَضْرَاءَ.</a:t>
@@ -14661,6 +14782,7 @@
                   <a:srgbClr val="1B3B6F"/>
                 </a:solidFill>
                 <a:latin typeface="Amiri" pitchFamily="2" charset="-78"/>
+                <a:ea typeface="Amiri" pitchFamily="2" charset="-78"/>
                 <a:cs typeface="Amiri" pitchFamily="2" charset="-78"/>
               </a:rPr>
               <a:t>وَمَاذَا تَقْتَرِحُ إِذَنْ؟</a:t>
@@ -14764,6 +14886,7 @@
                   <a:srgbClr val="1B3B6F"/>
                 </a:solidFill>
                 <a:latin typeface="Amiri" pitchFamily="2" charset="-78"/>
+                <a:ea typeface="Amiri" pitchFamily="2" charset="-78"/>
                 <a:cs typeface="Amiri" pitchFamily="2" charset="-78"/>
               </a:rPr>
               <a:t>نَعَمْ، فِي مَدِينَةِ لِيدْز، حَيْثُ حُوِّلَتْ حَدِيقَةٌ قَدِيمَةٌ إِلَى مَرْكَزٍ لِلْأَنْشِطَةِ، فَزَادَ عَدَدُ الزُّوَّارِ عَشْرَةَ أَضْعَافٍ.</a:t>
@@ -14840,6 +14963,7 @@
                   <a:srgbClr val="1B3B6F"/>
                 </a:solidFill>
                 <a:latin typeface="Amiri" pitchFamily="2" charset="-78"/>
+                <a:ea typeface="Amiri" pitchFamily="2" charset="-78"/>
                 <a:cs typeface="Amiri" pitchFamily="2" charset="-78"/>
               </a:rPr>
               <a:t>هَلْ هُنَاكَ مِثَالٌ نَاجِحٌ عَلَى ذٰلِكَ؟</a:t>
@@ -14943,6 +15067,7 @@
                   <a:srgbClr val="1B3B6F"/>
                 </a:solidFill>
                 <a:latin typeface="Amiri" pitchFamily="2" charset="-78"/>
+                <a:ea typeface="Amiri" pitchFamily="2" charset="-78"/>
                 <a:cs typeface="Amiri" pitchFamily="2" charset="-78"/>
               </a:rPr>
               <a:t>لَوْ كُنْتُ رَئِيسَ البَلَدِيَّةِ، لَبَنَيْتُ مَرْكَزًا لِلشَّبَابِ مَبْنِيًّا مِنْ مَوَادَّ صَدِيقَةٍ لِلْبِيئَةِ، بِجَانِبِ الحَدِيقَةِ نَفْسِهَا.</a:t>
@@ -15019,6 +15144,7 @@
                   <a:srgbClr val="1B3B6F"/>
                 </a:solidFill>
                 <a:latin typeface="Amiri" pitchFamily="2" charset="-78"/>
+                <a:ea typeface="Amiri" pitchFamily="2" charset="-78"/>
                 <a:cs typeface="Amiri" pitchFamily="2" charset="-78"/>
               </a:rPr>
               <a:t>لَوْ كُنْتَ رَئِيسَ البَلَدِيَّةِ، مَاذَا تَبْنِي أَوَّلًا؟</a:t>
@@ -15228,6 +15354,7 @@
                   <a:srgbClr val="D4AF37"/>
                 </a:solidFill>
                 <a:latin typeface="Amiri" pitchFamily="2" charset="-78"/>
+                <a:ea typeface="Amiri" pitchFamily="2" charset="-78"/>
                 <a:cs typeface="Amiri" pitchFamily="2" charset="-78"/>
               </a:rPr>
               <a:t>م</a:t>
@@ -15548,6 +15675,7 @@
                   <a:srgbClr val="8A6D1E"/>
                 </a:solidFill>
                 <a:latin typeface="Amiri" pitchFamily="2" charset="-78"/>
+                <a:ea typeface="Amiri" pitchFamily="2" charset="-78"/>
                 <a:cs typeface="Amiri" pitchFamily="2" charset="-78"/>
               </a:rPr>
               <a:t>مَدِينَتِي</a:t>
@@ -15828,6 +15956,7 @@
                   <a:srgbClr val="1B3B6F"/>
                 </a:solidFill>
                 <a:latin typeface="Amiri" pitchFamily="2" charset="-78"/>
+                <a:ea typeface="Amiri" pitchFamily="2" charset="-78"/>
                 <a:cs typeface="Amiri" pitchFamily="2" charset="-78"/>
               </a:rPr>
               <a:t>أَسْكُنُ فِي …</a:t>
@@ -15904,6 +16033,7 @@
                   <a:srgbClr val="1B3B6F"/>
                 </a:solidFill>
                 <a:latin typeface="Amiri" pitchFamily="2" charset="-78"/>
+                <a:ea typeface="Amiri" pitchFamily="2" charset="-78"/>
                 <a:cs typeface="Amiri" pitchFamily="2" charset="-78"/>
               </a:rPr>
               <a:t>أَيْنَ تَسْكُنُ؟</a:t>
@@ -16072,6 +16202,7 @@
                   <a:srgbClr val="1B3B6F"/>
                 </a:solidFill>
                 <a:latin typeface="Amiri" pitchFamily="2" charset="-78"/>
+                <a:ea typeface="Amiri" pitchFamily="2" charset="-78"/>
                 <a:cs typeface="Amiri" pitchFamily="2" charset="-78"/>
               </a:rPr>
               <a:t>يُوجَدُ … وَتُوجَدُ …</a:t>
@@ -16148,6 +16279,7 @@
                   <a:srgbClr val="1B3B6F"/>
                 </a:solidFill>
                 <a:latin typeface="Amiri" pitchFamily="2" charset="-78"/>
+                <a:ea typeface="Amiri" pitchFamily="2" charset="-78"/>
                 <a:cs typeface="Amiri" pitchFamily="2" charset="-78"/>
               </a:rPr>
               <a:t>مَاذَا يُوجَدُ فِي مَدِينَتِكَ؟</a:t>
@@ -16316,6 +16448,7 @@
                   <a:srgbClr val="1B3B6F"/>
                 </a:solidFill>
                 <a:latin typeface="Amiri" pitchFamily="2" charset="-78"/>
+                <a:ea typeface="Amiri" pitchFamily="2" charset="-78"/>
                 <a:cs typeface="Amiri" pitchFamily="2" charset="-78"/>
               </a:rPr>
               <a:t>نَعَمْ / لَا، مَدِينَتِي …</a:t>
@@ -16392,6 +16525,7 @@
                   <a:srgbClr val="1B3B6F"/>
                 </a:solidFill>
                 <a:latin typeface="Amiri" pitchFamily="2" charset="-78"/>
+                <a:ea typeface="Amiri" pitchFamily="2" charset="-78"/>
                 <a:cs typeface="Amiri" pitchFamily="2" charset="-78"/>
               </a:rPr>
               <a:t>هَلْ مَدِينَتُكَ كَبِيرَةٌ؟</a:t>
@@ -16560,6 +16694,7 @@
                   <a:srgbClr val="1B3B6F"/>
                 </a:solidFill>
                 <a:latin typeface="Amiri" pitchFamily="2" charset="-78"/>
+                <a:ea typeface="Amiri" pitchFamily="2" charset="-78"/>
                 <a:cs typeface="Amiri" pitchFamily="2" charset="-78"/>
               </a:rPr>
               <a:t>مَدْرَسَتِي … بِجَانِبِ / مُقَابِلَ …</a:t>
@@ -16636,6 +16771,7 @@
                   <a:srgbClr val="1B3B6F"/>
                 </a:solidFill>
                 <a:latin typeface="Amiri" pitchFamily="2" charset="-78"/>
+                <a:ea typeface="Amiri" pitchFamily="2" charset="-78"/>
                 <a:cs typeface="Amiri" pitchFamily="2" charset="-78"/>
               </a:rPr>
               <a:t>أَيْنَ مَدْرَسَتُكَ؟</a:t>
@@ -16804,6 +16940,7 @@
                   <a:srgbClr val="1B3B6F"/>
                 </a:solidFill>
                 <a:latin typeface="Amiri" pitchFamily="2" charset="-78"/>
+                <a:ea typeface="Amiri" pitchFamily="2" charset="-78"/>
                 <a:cs typeface="Amiri" pitchFamily="2" charset="-78"/>
               </a:rPr>
               <a:t>مَكَانِي المُفَضَّلُ … لِأَنَّ …</a:t>
@@ -16880,6 +17017,7 @@
                   <a:srgbClr val="1B3B6F"/>
                 </a:solidFill>
                 <a:latin typeface="Amiri" pitchFamily="2" charset="-78"/>
+                <a:ea typeface="Amiri" pitchFamily="2" charset="-78"/>
                 <a:cs typeface="Amiri" pitchFamily="2" charset="-78"/>
               </a:rPr>
               <a:t>مَا مَكَانُكَ المُفَضَّلُ فِي المَدِينَةِ؟</a:t>
@@ -17034,6 +17172,7 @@
                   <a:srgbClr val="1B3B6F"/>
                 </a:solidFill>
                 <a:latin typeface="Amiri" pitchFamily="2" charset="-78"/>
+                <a:ea typeface="Amiri" pitchFamily="2" charset="-78"/>
                 <a:cs typeface="Amiri" pitchFamily="2" charset="-78"/>
               </a:rPr>
               <a:t>عَفْوًا، هَلْ يُمْكِنُ أَنْ تُعِيدَ السُّؤَالَ؟</a:t>
@@ -17167,6 +17306,7 @@
                   <a:srgbClr val="D4AF37"/>
                 </a:solidFill>
                 <a:latin typeface="Amiri" pitchFamily="2" charset="-78"/>
+                <a:ea typeface="Amiri" pitchFamily="2" charset="-78"/>
                 <a:cs typeface="Amiri" pitchFamily="2" charset="-78"/>
               </a:rPr>
               <a:t>م</a:t>
@@ -17487,6 +17627,7 @@
                   <a:srgbClr val="8A6D1E"/>
                 </a:solidFill>
                 <a:latin typeface="Amiri" pitchFamily="2" charset="-78"/>
+                <a:ea typeface="Amiri" pitchFamily="2" charset="-78"/>
                 <a:cs typeface="Amiri" pitchFamily="2" charset="-78"/>
               </a:rPr>
               <a:t>الخِدْمَاتُ فِي مَدِينَتِي</a:t>
@@ -17767,6 +17908,7 @@
                   <a:srgbClr val="1B3B6F"/>
                 </a:solidFill>
                 <a:latin typeface="Amiri" pitchFamily="2" charset="-78"/>
+                <a:ea typeface="Amiri" pitchFamily="2" charset="-78"/>
                 <a:cs typeface="Amiri" pitchFamily="2" charset="-78"/>
               </a:rPr>
               <a:t>أَخْرُجُ مِنَ البَيْتِ، ثُمَّ أَمْشِي إِلَى …</a:t>
@@ -17843,6 +17985,7 @@
                   <a:srgbClr val="1B3B6F"/>
                 </a:solidFill>
                 <a:latin typeface="Amiri" pitchFamily="2" charset="-78"/>
+                <a:ea typeface="Amiri" pitchFamily="2" charset="-78"/>
                 <a:cs typeface="Amiri" pitchFamily="2" charset="-78"/>
               </a:rPr>
               <a:t>صِفِ الطَّرِيقَ مِنْ بَيْتِكَ إِلَى المَدْرَسَةِ.</a:t>
@@ -17946,6 +18089,7 @@
                   <a:srgbClr val="1B3B6F"/>
                 </a:solidFill>
                 <a:latin typeface="Amiri" pitchFamily="2" charset="-78"/>
+                <a:ea typeface="Amiri" pitchFamily="2" charset="-78"/>
                 <a:cs typeface="Amiri" pitchFamily="2" charset="-78"/>
               </a:rPr>
               <a:t>المُوَاصَلَاتُ … وَالمُسْتَشْفَى …</a:t>
@@ -18022,6 +18166,7 @@
                   <a:srgbClr val="1B3B6F"/>
                 </a:solidFill>
                 <a:latin typeface="Amiri" pitchFamily="2" charset="-78"/>
+                <a:ea typeface="Amiri" pitchFamily="2" charset="-78"/>
                 <a:cs typeface="Amiri" pitchFamily="2" charset="-78"/>
               </a:rPr>
               <a:t>مَا الخِدْمَاتُ الجَيِّدَةُ فِي مَدِينَتِكَ؟</a:t>
@@ -18125,6 +18270,7 @@
                   <a:srgbClr val="1B3B6F"/>
                 </a:solidFill>
                 <a:latin typeface="Amiri" pitchFamily="2" charset="-78"/>
+                <a:ea typeface="Amiri" pitchFamily="2" charset="-78"/>
                 <a:cs typeface="Amiri" pitchFamily="2" charset="-78"/>
               </a:rPr>
               <a:t>… أَكْبَرُ / أَقْدَمُ مِنْ …</a:t>
@@ -18201,6 +18347,7 @@
                   <a:srgbClr val="1B3B6F"/>
                 </a:solidFill>
                 <a:latin typeface="Amiri" pitchFamily="2" charset="-78"/>
+                <a:ea typeface="Amiri" pitchFamily="2" charset="-78"/>
                 <a:cs typeface="Amiri" pitchFamily="2" charset="-78"/>
               </a:rPr>
               <a:t>قَارِنْ بَيْنَ مَدِينَتِكَ وَمَدِينَةٍ عَرَبِيَّةٍ زُرْتَهَا.</a:t>
@@ -18304,6 +18451,7 @@
                   <a:srgbClr val="1B3B6F"/>
                 </a:solidFill>
                 <a:latin typeface="Amiri" pitchFamily="2" charset="-78"/>
+                <a:ea typeface="Amiri" pitchFamily="2" charset="-78"/>
                 <a:cs typeface="Amiri" pitchFamily="2" charset="-78"/>
               </a:rPr>
               <a:t>مِنْ أَشْهَرِ المَبَانِي … وَهُوَ مَبْنِيٌّ مِنْ …</a:t>
@@ -18380,6 +18528,7 @@
                   <a:srgbClr val="1B3B6F"/>
                 </a:solidFill>
                 <a:latin typeface="Amiri" pitchFamily="2" charset="-78"/>
+                <a:ea typeface="Amiri" pitchFamily="2" charset="-78"/>
                 <a:cs typeface="Amiri" pitchFamily="2" charset="-78"/>
               </a:rPr>
               <a:t>صِفْ مَبْنًى مَشْهُورًا فِي مَدِينَتِكَ.</a:t>
@@ -18483,6 +18632,7 @@
                   <a:srgbClr val="1B3B6F"/>
                 </a:solidFill>
                 <a:latin typeface="Amiri" pitchFamily="2" charset="-78"/>
+                <a:ea typeface="Amiri" pitchFamily="2" charset="-78"/>
                 <a:cs typeface="Amiri" pitchFamily="2" charset="-78"/>
               </a:rPr>
               <a:t>بُنِيَ … وَفُتِحَ …</a:t>
@@ -18559,6 +18709,7 @@
                   <a:srgbClr val="1B3B6F"/>
                 </a:solidFill>
                 <a:latin typeface="Amiri" pitchFamily="2" charset="-78"/>
+                <a:ea typeface="Amiri" pitchFamily="2" charset="-78"/>
                 <a:cs typeface="Amiri" pitchFamily="2" charset="-78"/>
               </a:rPr>
               <a:t>مَا الَّذِي تَغَيَّرَ فِي مَدِينَتِكَ فِي السَّنَوَاتِ الأَخِيرَةِ؟</a:t>
@@ -18768,6 +18919,7 @@
                   <a:srgbClr val="D4AF37"/>
                 </a:solidFill>
                 <a:latin typeface="Amiri" pitchFamily="2" charset="-78"/>
+                <a:ea typeface="Amiri" pitchFamily="2" charset="-78"/>
                 <a:cs typeface="Amiri" pitchFamily="2" charset="-78"/>
               </a:rPr>
               <a:t>م</a:t>
@@ -19088,6 +19240,7 @@
                   <a:srgbClr val="8A6D1E"/>
                 </a:solidFill>
                 <a:latin typeface="Amiri" pitchFamily="2" charset="-78"/>
+                <a:ea typeface="Amiri" pitchFamily="2" charset="-78"/>
                 <a:cs typeface="Amiri" pitchFamily="2" charset="-78"/>
               </a:rPr>
               <a:t>مُدُنُ المُسْتَقْبَلِ</a:t>
@@ -19368,6 +19521,7 @@
                   <a:srgbClr val="1B3B6F"/>
                 </a:solidFill>
                 <a:latin typeface="Amiri" pitchFamily="2" charset="-78"/>
+                <a:ea typeface="Amiri" pitchFamily="2" charset="-78"/>
                 <a:cs typeface="Amiri" pitchFamily="2" charset="-78"/>
               </a:rPr>
               <a:t>مِنْ نَاحِيَةٍ … وَمِنْ نَاحِيَةٍ أُخْرَى …</a:t>
@@ -19444,6 +19598,7 @@
                   <a:srgbClr val="1B3B6F"/>
                 </a:solidFill>
                 <a:latin typeface="Amiri" pitchFamily="2" charset="-78"/>
+                <a:ea typeface="Amiri" pitchFamily="2" charset="-78"/>
                 <a:cs typeface="Amiri" pitchFamily="2" charset="-78"/>
               </a:rPr>
               <a:t>هَلِ الحَيَاةُ فِي المَدِينَةِ أَفْضَلُ مِنَ الحَيَاةِ فِي القَرْيَةِ؟</a:t>
@@ -19547,6 +19702,7 @@
                   <a:srgbClr val="1B3B6F"/>
                 </a:solidFill>
                 <a:latin typeface="Amiri" pitchFamily="2" charset="-78"/>
+                <a:ea typeface="Amiri" pitchFamily="2" charset="-78"/>
                 <a:cs typeface="Amiri" pitchFamily="2" charset="-78"/>
               </a:rPr>
               <a:t>بِسَبَبِ … مِمَّا يُؤَدِّي إِلَى …</a:t>
@@ -19623,6 +19779,7 @@
                   <a:srgbClr val="1B3B6F"/>
                 </a:solidFill>
                 <a:latin typeface="Amiri" pitchFamily="2" charset="-78"/>
+                <a:ea typeface="Amiri" pitchFamily="2" charset="-78"/>
                 <a:cs typeface="Amiri" pitchFamily="2" charset="-78"/>
               </a:rPr>
               <a:t>لِمَاذَا يَنْتَقِلُ كَثِيرٌ مِنَ النَّاسِ إِلَى المُدُنِ؟</a:t>
@@ -19726,6 +19883,7 @@
                   <a:srgbClr val="1B3B6F"/>
                 </a:solidFill>
                 <a:latin typeface="Amiri" pitchFamily="2" charset="-78"/>
+                <a:ea typeface="Amiri" pitchFamily="2" charset="-78"/>
                 <a:cs typeface="Amiri" pitchFamily="2" charset="-78"/>
               </a:rPr>
               <a:t>صَحِيحٌ أَنَّ … غَيْرَ أَنَّ …</a:t>
@@ -19802,6 +19960,7 @@
                   <a:srgbClr val="1B3B6F"/>
                 </a:solidFill>
                 <a:latin typeface="Amiri" pitchFamily="2" charset="-78"/>
+                <a:ea typeface="Amiri" pitchFamily="2" charset="-78"/>
                 <a:cs typeface="Amiri" pitchFamily="2" charset="-78"/>
               </a:rPr>
               <a:t>هَلْ يَجِبُ أَنْ نُحَافِظَ عَلَى المَبَانِي القَدِيمَةِ؟</a:t>
@@ -19905,6 +20064,7 @@
                   <a:srgbClr val="1B3B6F"/>
                 </a:solidFill>
                 <a:latin typeface="Amiri" pitchFamily="2" charset="-78"/>
+                <a:ea typeface="Amiri" pitchFamily="2" charset="-78"/>
                 <a:cs typeface="Amiri" pitchFamily="2" charset="-78"/>
               </a:rPr>
               <a:t>يَقُولُ جَدِّي إِنَّ … كَانَتْ …</a:t>
@@ -19981,6 +20141,7 @@
                   <a:srgbClr val="1B3B6F"/>
                 </a:solidFill>
                 <a:latin typeface="Amiri" pitchFamily="2" charset="-78"/>
+                <a:ea typeface="Amiri" pitchFamily="2" charset="-78"/>
                 <a:cs typeface="Amiri" pitchFamily="2" charset="-78"/>
               </a:rPr>
               <a:t>كَيْفَ كَانَتْ مَدِينَتُكَ فِي أَيَّامِ أَجْدَادِكَ؟</a:t>
@@ -20084,6 +20245,7 @@
                   <a:srgbClr val="1B3B6F"/>
                 </a:solidFill>
                 <a:latin typeface="Amiri" pitchFamily="2" charset="-78"/>
+                <a:ea typeface="Amiri" pitchFamily="2" charset="-78"/>
                 <a:cs typeface="Amiri" pitchFamily="2" charset="-78"/>
               </a:rPr>
               <a:t>لَوْ صَمَّمْتُهَا، لَجَعَلْتُ …</a:t>
@@ -20160,6 +20322,7 @@
                   <a:srgbClr val="1B3B6F"/>
                 </a:solidFill>
                 <a:latin typeface="Amiri" pitchFamily="2" charset="-78"/>
+                <a:ea typeface="Amiri" pitchFamily="2" charset="-78"/>
                 <a:cs typeface="Amiri" pitchFamily="2" charset="-78"/>
               </a:rPr>
               <a:t>لَوْ صَمَّمْتَ مَدِينَةَ المُسْتَقْبَلِ، كَيْفَ تَكُونُ؟</a:t>
@@ -20369,6 +20532,7 @@
                   <a:srgbClr val="D4AF37"/>
                 </a:solidFill>
                 <a:latin typeface="Amiri" pitchFamily="2" charset="-78"/>
+                <a:ea typeface="Amiri" pitchFamily="2" charset="-78"/>
                 <a:cs typeface="Amiri" pitchFamily="2" charset="-78"/>
               </a:rPr>
               <a:t>م</a:t>
@@ -20689,6 +20853,7 @@
                   <a:srgbClr val="8A6D1E"/>
                 </a:solidFill>
                 <a:latin typeface="Amiri" pitchFamily="2" charset="-78"/>
+                <a:ea typeface="Amiri" pitchFamily="2" charset="-78"/>
                 <a:cs typeface="Amiri" pitchFamily="2" charset="-78"/>
               </a:rPr>
               <a:t>آدَابُ الصَّفِّ</a:t>
@@ -22220,6 +22385,7 @@
                   <a:srgbClr val="D4AF37"/>
                 </a:solidFill>
                 <a:latin typeface="Amiri" pitchFamily="2" charset="-78"/>
+                <a:ea typeface="Amiri" pitchFamily="2" charset="-78"/>
                 <a:cs typeface="Amiri" pitchFamily="2" charset="-78"/>
               </a:rPr>
               <a:t>م</a:t>
@@ -22540,6 +22706,7 @@
                   <a:srgbClr val="8A6D1E"/>
                 </a:solidFill>
                 <a:latin typeface="Amiri" pitchFamily="2" charset="-78"/>
+                <a:ea typeface="Amiri" pitchFamily="2" charset="-78"/>
                 <a:cs typeface="Amiri" pitchFamily="2" charset="-78"/>
               </a:rPr>
               <a:t>نَمُوذَجُ الإِجَابَةِ</a:t>
@@ -22782,6 +22949,7 @@
                   <a:srgbClr val="1B3B6F"/>
                 </a:solidFill>
                 <a:latin typeface="Amiri" pitchFamily="2" charset="-78"/>
+                <a:ea typeface="Amiri" pitchFamily="2" charset="-78"/>
                 <a:cs typeface="Amiri" pitchFamily="2" charset="-78"/>
               </a:rPr>
               <a:t>أَسْكُنُ فِي حَيٍّ هَادِئٍ فِي بِرْمِنْغْهَامَ.</a:t>
@@ -22858,6 +23026,7 @@
                   <a:srgbClr val="1B3B6F"/>
                 </a:solidFill>
                 <a:latin typeface="Amiri" pitchFamily="2" charset="-78"/>
+                <a:ea typeface="Amiri" pitchFamily="2" charset="-78"/>
                 <a:cs typeface="Amiri" pitchFamily="2" charset="-78"/>
               </a:rPr>
               <a:t>أَيْنَ تَسْكُنُ؟</a:t>
@@ -22961,6 +23130,7 @@
                   <a:srgbClr val="1B3B6F"/>
                 </a:solidFill>
                 <a:latin typeface="Amiri" pitchFamily="2" charset="-78"/>
+                <a:ea typeface="Amiri" pitchFamily="2" charset="-78"/>
                 <a:cs typeface="Amiri" pitchFamily="2" charset="-78"/>
               </a:rPr>
               <a:t>يُوجَدُ مَتْحَفٌ كَبِيرٌ، وَتُوجَدُ حَدَائِقُ كَثِيرَةٌ.</a:t>
@@ -23037,6 +23207,7 @@
                   <a:srgbClr val="1B3B6F"/>
                 </a:solidFill>
                 <a:latin typeface="Amiri" pitchFamily="2" charset="-78"/>
+                <a:ea typeface="Amiri" pitchFamily="2" charset="-78"/>
                 <a:cs typeface="Amiri" pitchFamily="2" charset="-78"/>
               </a:rPr>
               <a:t>مَاذَا يُوجَدُ فِي مَدِينَتِكَ؟</a:t>
@@ -23140,6 +23311,7 @@
                   <a:srgbClr val="1B3B6F"/>
                 </a:solidFill>
                 <a:latin typeface="Amiri" pitchFamily="2" charset="-78"/>
+                <a:ea typeface="Amiri" pitchFamily="2" charset="-78"/>
                 <a:cs typeface="Amiri" pitchFamily="2" charset="-78"/>
               </a:rPr>
               <a:t>نَعَمْ، مَدِينَتِي كَبِيرَةٌ وَمُزْدَحِمَةٌ.</a:t>
@@ -23216,6 +23388,7 @@
                   <a:srgbClr val="1B3B6F"/>
                 </a:solidFill>
                 <a:latin typeface="Amiri" pitchFamily="2" charset="-78"/>
+                <a:ea typeface="Amiri" pitchFamily="2" charset="-78"/>
                 <a:cs typeface="Amiri" pitchFamily="2" charset="-78"/>
               </a:rPr>
               <a:t>هَلْ مَدِينَتُكَ كَبِيرَةٌ؟</a:t>
@@ -23319,6 +23492,7 @@
                   <a:srgbClr val="1B3B6F"/>
                 </a:solidFill>
                 <a:latin typeface="Amiri" pitchFamily="2" charset="-78"/>
+                <a:ea typeface="Amiri" pitchFamily="2" charset="-78"/>
                 <a:cs typeface="Amiri" pitchFamily="2" charset="-78"/>
               </a:rPr>
               <a:t>مَدْرَسَتِي مُقَابِلَ المَكْتَبَةِ العَامَّةِ.</a:t>
@@ -23395,6 +23569,7 @@
                   <a:srgbClr val="1B3B6F"/>
                 </a:solidFill>
                 <a:latin typeface="Amiri" pitchFamily="2" charset="-78"/>
+                <a:ea typeface="Amiri" pitchFamily="2" charset="-78"/>
                 <a:cs typeface="Amiri" pitchFamily="2" charset="-78"/>
               </a:rPr>
               <a:t>أَيْنَ مَدْرَسَتُكَ؟</a:t>
@@ -23498,6 +23673,7 @@
                   <a:srgbClr val="1B3B6F"/>
                 </a:solidFill>
                 <a:latin typeface="Amiri" pitchFamily="2" charset="-78"/>
+                <a:ea typeface="Amiri" pitchFamily="2" charset="-78"/>
                 <a:cs typeface="Amiri" pitchFamily="2" charset="-78"/>
               </a:rPr>
               <a:t>مَكَانِيَ المُفَضَّلُ المَكْتَبَةُ، لِأَنَّهَا هَادِئَةٌ.</a:t>
@@ -23574,6 +23750,7 @@
                   <a:srgbClr val="1B3B6F"/>
                 </a:solidFill>
                 <a:latin typeface="Amiri" pitchFamily="2" charset="-78"/>
+                <a:ea typeface="Amiri" pitchFamily="2" charset="-78"/>
                 <a:cs typeface="Amiri" pitchFamily="2" charset="-78"/>
               </a:rPr>
               <a:t>مَا مَكَانُكَ المُفَضَّلُ فِي المَدِينَةِ؟</a:t>
@@ -23783,6 +23960,7 @@
                   <a:srgbClr val="D4AF37"/>
                 </a:solidFill>
                 <a:latin typeface="Amiri" pitchFamily="2" charset="-78"/>
+                <a:ea typeface="Amiri" pitchFamily="2" charset="-78"/>
                 <a:cs typeface="Amiri" pitchFamily="2" charset="-78"/>
               </a:rPr>
               <a:t>م</a:t>
@@ -24103,6 +24281,7 @@
                   <a:srgbClr val="8A6D1E"/>
                 </a:solidFill>
                 <a:latin typeface="Amiri" pitchFamily="2" charset="-78"/>
+                <a:ea typeface="Amiri" pitchFamily="2" charset="-78"/>
                 <a:cs typeface="Amiri" pitchFamily="2" charset="-78"/>
               </a:rPr>
               <a:t>نَمُوذَجُ الإِجَابَةِ</a:t>
@@ -24345,6 +24524,7 @@
                   <a:srgbClr val="1B3B6F"/>
                 </a:solidFill>
                 <a:latin typeface="Amiri" pitchFamily="2" charset="-78"/>
+                <a:ea typeface="Amiri" pitchFamily="2" charset="-78"/>
                 <a:cs typeface="Amiri" pitchFamily="2" charset="-78"/>
               </a:rPr>
               <a:t>أَخْرُجُ مِنَ البَيْتِ، ثُمَّ أَمْشِي إِلَى المَحَطَّةِ الَّتِي تَقَعُ بِجَانِبِ البَنْكِ، وَأَرْكَبُ الحَافِلَةَ عَشْرَ دَقَائِقَ.</a:t>
@@ -24421,6 +24601,7 @@
                   <a:srgbClr val="1B3B6F"/>
                 </a:solidFill>
                 <a:latin typeface="Amiri" pitchFamily="2" charset="-78"/>
+                <a:ea typeface="Amiri" pitchFamily="2" charset="-78"/>
                 <a:cs typeface="Amiri" pitchFamily="2" charset="-78"/>
               </a:rPr>
               <a:t>صِفِ الطَّرِيقَ مِنْ بَيْتِكَ إِلَى المَدْرَسَةِ.</a:t>
@@ -24524,6 +24705,7 @@
                   <a:srgbClr val="1B3B6F"/>
                 </a:solidFill>
                 <a:latin typeface="Amiri" pitchFamily="2" charset="-78"/>
+                <a:ea typeface="Amiri" pitchFamily="2" charset="-78"/>
                 <a:cs typeface="Amiri" pitchFamily="2" charset="-78"/>
               </a:rPr>
               <a:t>المُوَاصَلَاتُ سَرِيعَةٌ، وَالمُسْتَشْفَى حَدِيثٌ، لٰكِنَّ الحَدَائِقَ قَلِيلَةٌ.</a:t>
@@ -24600,6 +24782,7 @@
                   <a:srgbClr val="1B3B6F"/>
                 </a:solidFill>
                 <a:latin typeface="Amiri" pitchFamily="2" charset="-78"/>
+                <a:ea typeface="Amiri" pitchFamily="2" charset="-78"/>
                 <a:cs typeface="Amiri" pitchFamily="2" charset="-78"/>
               </a:rPr>
               <a:t>مَا الخِدْمَاتُ الجَيِّدَةُ فِي مَدِينَتِكَ؟</a:t>
@@ -24703,6 +24886,7 @@
                   <a:srgbClr val="1B3B6F"/>
                 </a:solidFill>
                 <a:latin typeface="Amiri" pitchFamily="2" charset="-78"/>
+                <a:ea typeface="Amiri" pitchFamily="2" charset="-78"/>
                 <a:cs typeface="Amiri" pitchFamily="2" charset="-78"/>
               </a:rPr>
               <a:t>القَاهِرَةُ أَكْبَرُ وَأَقْدَمُ مِنْ مَدِينَتِي بِكَثِيرٍ، وَشَوَارِعُهَا أَكْثَرُ ازْدِحَامًا، لٰكِنَّ أَسْوَاقَهَا أَجْمَلُ.</a:t>
@@ -24779,6 +24963,7 @@
                   <a:srgbClr val="1B3B6F"/>
                 </a:solidFill>
                 <a:latin typeface="Amiri" pitchFamily="2" charset="-78"/>
+                <a:ea typeface="Amiri" pitchFamily="2" charset="-78"/>
                 <a:cs typeface="Amiri" pitchFamily="2" charset="-78"/>
               </a:rPr>
               <a:t>قَارِنْ بَيْنَ مَدِينَتِكَ وَمَدِينَةٍ عَرَبِيَّةٍ زُرْتَهَا.</a:t>
@@ -24882,6 +25067,7 @@
                   <a:srgbClr val="1B3B6F"/>
                 </a:solidFill>
                 <a:latin typeface="Amiri" pitchFamily="2" charset="-78"/>
+                <a:ea typeface="Amiri" pitchFamily="2" charset="-78"/>
                 <a:cs typeface="Amiri" pitchFamily="2" charset="-78"/>
               </a:rPr>
               <a:t>مِنْ أَشْهَرِ المَبَانِي المَكْتَبَةُ المَرْكَزِيَّةُ؛ هِيَ مَبْنِيَّةٌ مِنَ الزُّجَاجِ وَالحَدِيدِ، وَفِيهَا حَدِيقَةٌ عَلَى السَّطْحِ.</a:t>
@@ -24958,6 +25144,7 @@
                   <a:srgbClr val="1B3B6F"/>
                 </a:solidFill>
                 <a:latin typeface="Amiri" pitchFamily="2" charset="-78"/>
+                <a:ea typeface="Amiri" pitchFamily="2" charset="-78"/>
                 <a:cs typeface="Amiri" pitchFamily="2" charset="-78"/>
               </a:rPr>
               <a:t>صِفْ مَبْنًى مَشْهُورًا فِي مَدِينَتِكَ.</a:t>
@@ -25061,6 +25248,7 @@
                   <a:srgbClr val="1B3B6F"/>
                 </a:solidFill>
                 <a:latin typeface="Amiri" pitchFamily="2" charset="-78"/>
+                <a:ea typeface="Amiri" pitchFamily="2" charset="-78"/>
                 <a:cs typeface="Amiri" pitchFamily="2" charset="-78"/>
               </a:rPr>
               <a:t>بُنِيَ مَرْكَزٌ رِيَاضِيٌّ جَدِيدٌ، وَفُتِحَتْ مَحَطَّةٌ لِلْقِطَارِ السَّرِيعِ.</a:t>
@@ -25140,6 +25328,7 @@
                   <a:srgbClr val="1B3B6F"/>
                 </a:solidFill>
                 <a:latin typeface="Amiri" pitchFamily="2" charset="-78"/>
+                <a:ea typeface="Amiri" pitchFamily="2" charset="-78"/>
                 <a:cs typeface="Amiri" pitchFamily="2" charset="-78"/>
               </a:rPr>
               <a:t>مَا الَّذِي تَغَيَّرَ فِي مَدِينَتِكَ فِي السَّنَوَاتِ الأَخِيرَةِ؟</a:t>
@@ -25349,6 +25538,7 @@
                   <a:srgbClr val="D4AF37"/>
                 </a:solidFill>
                 <a:latin typeface="Amiri" pitchFamily="2" charset="-78"/>
+                <a:ea typeface="Amiri" pitchFamily="2" charset="-78"/>
                 <a:cs typeface="Amiri" pitchFamily="2" charset="-78"/>
               </a:rPr>
               <a:t>م</a:t>
@@ -25669,6 +25859,7 @@
                   <a:srgbClr val="8A6D1E"/>
                 </a:solidFill>
                 <a:latin typeface="Amiri" pitchFamily="2" charset="-78"/>
+                <a:ea typeface="Amiri" pitchFamily="2" charset="-78"/>
                 <a:cs typeface="Amiri" pitchFamily="2" charset="-78"/>
               </a:rPr>
               <a:t>نَمُوذَجُ الإِجَابَةِ</a:t>
@@ -25911,6 +26102,7 @@
                   <a:srgbClr val="1B3B6F"/>
                 </a:solidFill>
                 <a:latin typeface="Amiri" pitchFamily="2" charset="-78"/>
+                <a:ea typeface="Amiri" pitchFamily="2" charset="-78"/>
                 <a:cs typeface="Amiri" pitchFamily="2" charset="-78"/>
               </a:rPr>
               <a:t>مِنْ نَاحِيَةٍ، تُقَدِّمُ المَدِينَةُ خِدْمَاتٍ وَفُرَصًا أَكْثَرَ، وَمِنْ نَاحِيَةٍ أُخْرَى، القَرْيَةُ أَهْدَأُ وَأَنْظَفُ، وَالعَلَاقَاتُ فِيهَا أَقْوَى.</a:t>
@@ -25990,6 +26182,7 @@
                   <a:srgbClr val="1B3B6F"/>
                 </a:solidFill>
                 <a:latin typeface="Amiri" pitchFamily="2" charset="-78"/>
+                <a:ea typeface="Amiri" pitchFamily="2" charset="-78"/>
                 <a:cs typeface="Amiri" pitchFamily="2" charset="-78"/>
               </a:rPr>
               <a:t>هَلِ الحَيَاةُ فِي المَدِينَةِ أَفْضَلُ مِنَ الحَيَاةِ فِي القَرْيَةِ؟</a:t>
@@ -26093,6 +26286,7 @@
                   <a:srgbClr val="1B3B6F"/>
                 </a:solidFill>
                 <a:latin typeface="Amiri" pitchFamily="2" charset="-78"/>
+                <a:ea typeface="Amiri" pitchFamily="2" charset="-78"/>
                 <a:cs typeface="Amiri" pitchFamily="2" charset="-78"/>
               </a:rPr>
               <a:t>بِسَبَبِ قِلَّةِ العَمَلِ فِي الرِّيفِ، مِمَّا يُؤَدِّي إِلَى ازْدِحَامِ المُدُنِ وَارْتِفَاعِ أَسْعَارِ السَّكَنِ.</a:t>
@@ -26169,6 +26363,7 @@
                   <a:srgbClr val="1B3B6F"/>
                 </a:solidFill>
                 <a:latin typeface="Amiri" pitchFamily="2" charset="-78"/>
+                <a:ea typeface="Amiri" pitchFamily="2" charset="-78"/>
                 <a:cs typeface="Amiri" pitchFamily="2" charset="-78"/>
               </a:rPr>
               <a:t>لِمَاذَا يَنْتَقِلُ كَثِيرٌ مِنَ النَّاسِ إِلَى المُدُنِ؟</a:t>
@@ -26272,6 +26467,7 @@
                   <a:srgbClr val="1B3B6F"/>
                 </a:solidFill>
                 <a:latin typeface="Amiri" pitchFamily="2" charset="-78"/>
+                <a:ea typeface="Amiri" pitchFamily="2" charset="-78"/>
                 <a:cs typeface="Amiri" pitchFamily="2" charset="-78"/>
               </a:rPr>
               <a:t>صَحِيحٌ أَنَّ صِيَانَتَهَا مُكْلِفَةٌ، غَيْرَ أَنَّهَا تَحْكِي تَارِيخَ المَدِينَةِ، وَتَجْذِبُ السُّيَّاحَ.</a:t>
@@ -26348,6 +26544,7 @@
                   <a:srgbClr val="1B3B6F"/>
                 </a:solidFill>
                 <a:latin typeface="Amiri" pitchFamily="2" charset="-78"/>
+                <a:ea typeface="Amiri" pitchFamily="2" charset="-78"/>
                 <a:cs typeface="Amiri" pitchFamily="2" charset="-78"/>
               </a:rPr>
               <a:t>هَلْ يَجِبُ أَنْ نُحَافِظَ عَلَى المَبَانِي القَدِيمَةِ؟</a:t>
@@ -26557,6 +26754,7 @@
                   <a:srgbClr val="D4AF37"/>
                 </a:solidFill>
                 <a:latin typeface="Amiri" pitchFamily="2" charset="-78"/>
+                <a:ea typeface="Amiri" pitchFamily="2" charset="-78"/>
                 <a:cs typeface="Amiri" pitchFamily="2" charset="-78"/>
               </a:rPr>
               <a:t>م</a:t>
@@ -26877,6 +27075,7 @@
                   <a:srgbClr val="8A6D1E"/>
                 </a:solidFill>
                 <a:latin typeface="Amiri" pitchFamily="2" charset="-78"/>
+                <a:ea typeface="Amiri" pitchFamily="2" charset="-78"/>
                 <a:cs typeface="Amiri" pitchFamily="2" charset="-78"/>
               </a:rPr>
               <a:t>نَمُوذَجُ الإِجَابَةِ</a:t>
@@ -27119,6 +27318,7 @@
                   <a:srgbClr val="1B3B6F"/>
                 </a:solidFill>
                 <a:latin typeface="Amiri" pitchFamily="2" charset="-78"/>
+                <a:ea typeface="Amiri" pitchFamily="2" charset="-78"/>
                 <a:cs typeface="Amiri" pitchFamily="2" charset="-78"/>
               </a:rPr>
               <a:t>يَقُولُ جَدِّي إِنَّ مُعْظَمَ البُيُوتِ كَانَتْ مَبْنِيَّةً مِنَ الطُّوبِ الأَحْمَرِ، وَإِنَّ الحَيَّ كُلَّهُ كَانَ يَعْرِفُ بَعْضَهُ.</a:t>
@@ -27195,6 +27395,7 @@
                   <a:srgbClr val="1B3B6F"/>
                 </a:solidFill>
                 <a:latin typeface="Amiri" pitchFamily="2" charset="-78"/>
+                <a:ea typeface="Amiri" pitchFamily="2" charset="-78"/>
                 <a:cs typeface="Amiri" pitchFamily="2" charset="-78"/>
               </a:rPr>
               <a:t>كَيْفَ كَانَتْ مَدِينَتُكَ فِي أَيَّامِ أَجْدَادِكَ؟</a:t>
@@ -27298,6 +27499,7 @@
                   <a:srgbClr val="1B3B6F"/>
                 </a:solidFill>
                 <a:latin typeface="Amiri" pitchFamily="2" charset="-78"/>
+                <a:ea typeface="Amiri" pitchFamily="2" charset="-78"/>
                 <a:cs typeface="Amiri" pitchFamily="2" charset="-78"/>
               </a:rPr>
               <a:t>لَوْ صَمَّمْتُهَا، لَجَعَلْتُ السَّيَّارَاتِ تَحْتَ الأَرْضِ، وَلَزَرَعْتُ الأَشْجَارَ عَلَى أَسْطُحِ كُلِّ المَبَانِي.</a:t>
@@ -27374,6 +27576,7 @@
                   <a:srgbClr val="1B3B6F"/>
                 </a:solidFill>
                 <a:latin typeface="Amiri" pitchFamily="2" charset="-78"/>
+                <a:ea typeface="Amiri" pitchFamily="2" charset="-78"/>
                 <a:cs typeface="Amiri" pitchFamily="2" charset="-78"/>
               </a:rPr>
               <a:t>لَوْ صَمَّمْتَ مَدِينَةَ المُسْتَقْبَلِ، كَيْفَ تَكُونُ؟</a:t>
@@ -27583,6 +27786,7 @@
                   <a:srgbClr val="D4AF37"/>
                 </a:solidFill>
                 <a:latin typeface="Amiri" pitchFamily="2" charset="-78"/>
+                <a:ea typeface="Amiri" pitchFamily="2" charset="-78"/>
                 <a:cs typeface="Amiri" pitchFamily="2" charset="-78"/>
               </a:rPr>
               <a:t>م</a:t>
@@ -27903,6 +28107,7 @@
                   <a:srgbClr val="8A6D1E"/>
                 </a:solidFill>
                 <a:latin typeface="Amiri" pitchFamily="2" charset="-78"/>
+                <a:ea typeface="Amiri" pitchFamily="2" charset="-78"/>
                 <a:cs typeface="Amiri" pitchFamily="2" charset="-78"/>
               </a:rPr>
               <a:t>قَيِّمْ عَمَلَكَ</a:t>
@@ -29147,6 +29352,7 @@
                   <a:srgbClr val="FFFFFF"/>
                 </a:solidFill>
                 <a:latin typeface="Amiri" pitchFamily="2" charset="-78"/>
+                <a:ea typeface="Amiri" pitchFamily="2" charset="-78"/>
                 <a:cs typeface="Amiri" pitchFamily="2" charset="-78"/>
               </a:rPr>
               <a:t>أَحْسَنْتُمْ! إِلَى اللِّقَاءِ</a:t>
@@ -29299,6 +29505,7 @@
                   <a:srgbClr val="D4AF37"/>
                 </a:solidFill>
                 <a:latin typeface="Amiri" pitchFamily="2" charset="-78"/>
+                <a:ea typeface="Amiri" pitchFamily="2" charset="-78"/>
                 <a:cs typeface="Amiri" pitchFamily="2" charset="-78"/>
               </a:rPr>
               <a:t>وَرْشَةُ الكِتَابَةِ</a:t>
@@ -29432,6 +29639,7 @@
                   <a:srgbClr val="D4AF37"/>
                 </a:solidFill>
                 <a:latin typeface="Amiri" pitchFamily="2" charset="-78"/>
+                <a:ea typeface="Amiri" pitchFamily="2" charset="-78"/>
                 <a:cs typeface="Amiri" pitchFamily="2" charset="-78"/>
               </a:rPr>
               <a:t>م</a:t>
@@ -29752,6 +29960,7 @@
                   <a:srgbClr val="8A6D1E"/>
                 </a:solidFill>
                 <a:latin typeface="Amiri" pitchFamily="2" charset="-78"/>
+                <a:ea typeface="Amiri" pitchFamily="2" charset="-78"/>
                 <a:cs typeface="Amiri" pitchFamily="2" charset="-78"/>
               </a:rPr>
               <a:t>خَرِيطَةُ الوَرْشَةِ</a:t>
@@ -30066,6 +30275,7 @@
                   <a:srgbClr val="1B3B6F"/>
                 </a:solidFill>
                 <a:latin typeface="Amiri" pitchFamily="2" charset="-78"/>
+                <a:ea typeface="Amiri" pitchFamily="2" charset="-78"/>
                 <a:cs typeface="Amiri" pitchFamily="2" charset="-78"/>
               </a:rPr>
               <a:t>كَيْفَ</a:t>
@@ -30342,6 +30552,7 @@
                   <a:srgbClr val="1E6B52"/>
                 </a:solidFill>
                 <a:latin typeface="Amiri" pitchFamily="2" charset="-78"/>
+                <a:ea typeface="Amiri" pitchFamily="2" charset="-78"/>
                 <a:cs typeface="Amiri" pitchFamily="2" charset="-78"/>
               </a:rPr>
               <a:t>تَمْثِيلُ الدَّوْرِ</a:t>
@@ -30618,6 +30829,7 @@
                   <a:srgbClr val="8A6D1E"/>
                 </a:solidFill>
                 <a:latin typeface="Amiri" pitchFamily="2" charset="-78"/>
+                <a:ea typeface="Amiri" pitchFamily="2" charset="-78"/>
                 <a:cs typeface="Amiri" pitchFamily="2" charset="-78"/>
               </a:rPr>
               <a:t>النَّمُوذَجُ</a:t>
@@ -30894,6 +31106,7 @@
                   <a:srgbClr val="1E6B52"/>
                 </a:solidFill>
                 <a:latin typeface="Amiri" pitchFamily="2" charset="-78"/>
+                <a:ea typeface="Amiri" pitchFamily="2" charset="-78"/>
                 <a:cs typeface="Amiri" pitchFamily="2" charset="-78"/>
               </a:rPr>
               <a:t>المُحَادَثَةُ</a:t>
@@ -31170,6 +31383,7 @@
                   <a:srgbClr val="8A6D1E"/>
                 </a:solidFill>
                 <a:latin typeface="Amiri" pitchFamily="2" charset="-78"/>
+                <a:ea typeface="Amiri" pitchFamily="2" charset="-78"/>
                 <a:cs typeface="Amiri" pitchFamily="2" charset="-78"/>
               </a:rPr>
               <a:t>قَيِّمْ</a:t>
@@ -31413,6 +31627,7 @@
                   <a:srgbClr val="D4AF37"/>
                 </a:solidFill>
                 <a:latin typeface="Amiri" pitchFamily="2" charset="-78"/>
+                <a:ea typeface="Amiri" pitchFamily="2" charset="-78"/>
                 <a:cs typeface="Amiri" pitchFamily="2" charset="-78"/>
               </a:rPr>
               <a:t>م</a:t>
@@ -31733,6 +31948,7 @@
                   <a:srgbClr val="8A6D1E"/>
                 </a:solidFill>
                 <a:latin typeface="Amiri" pitchFamily="2" charset="-78"/>
+                <a:ea typeface="Amiri" pitchFamily="2" charset="-78"/>
                 <a:cs typeface="Amiri" pitchFamily="2" charset="-78"/>
               </a:rPr>
               <a:t>امْتِحَانُ التَّحَدُّثِ</a:t>
@@ -32357,6 +32573,7 @@
                   <a:srgbClr val="1B3B6F"/>
                 </a:solidFill>
                 <a:latin typeface="Amiri" pitchFamily="2" charset="-78"/>
+                <a:ea typeface="Amiri" pitchFamily="2" charset="-78"/>
                 <a:cs typeface="Amiri" pitchFamily="2" charset="-78"/>
               </a:rPr>
               <a:t>عَفْوًا، هَلْ يُمْكِنُ أَنْ تُعِيدَ السُّؤَالَ؟</a:t>
@@ -32456,6 +32673,7 @@
                   <a:srgbClr val="1B3B6F"/>
                 </a:solidFill>
                 <a:latin typeface="Amiri" pitchFamily="2" charset="-78"/>
+                <a:ea typeface="Amiri" pitchFamily="2" charset="-78"/>
                 <a:cs typeface="Amiri" pitchFamily="2" charset="-78"/>
               </a:rPr>
               <a:t>لَحْظَةً، دَعْنِي أُفَكِّرُ …</a:t>
@@ -32555,6 +32773,7 @@
                   <a:srgbClr val="1B3B6F"/>
                 </a:solidFill>
                 <a:latin typeface="Amiri" pitchFamily="2" charset="-78"/>
+                <a:ea typeface="Amiri" pitchFamily="2" charset="-78"/>
                 <a:cs typeface="Amiri" pitchFamily="2" charset="-78"/>
               </a:rPr>
               <a:t>أَقْصِدُ …</a:t>
@@ -32726,6 +32945,7 @@
                   <a:srgbClr val="D4AF37"/>
                 </a:solidFill>
                 <a:latin typeface="Amiri" pitchFamily="2" charset="-78"/>
+                <a:ea typeface="Amiri" pitchFamily="2" charset="-78"/>
                 <a:cs typeface="Amiri" pitchFamily="2" charset="-78"/>
               </a:rPr>
               <a:t>م</a:t>
@@ -33046,6 +33266,7 @@
                   <a:srgbClr val="8A6D1E"/>
                 </a:solidFill>
                 <a:latin typeface="Amiri" pitchFamily="2" charset="-78"/>
+                <a:ea typeface="Amiri" pitchFamily="2" charset="-78"/>
                 <a:cs typeface="Amiri" pitchFamily="2" charset="-78"/>
               </a:rPr>
               <a:t>أَمَاكِنُ فِي المَدِينَةِ</a:t>
@@ -33349,6 +33570,7 @@
                   <a:srgbClr val="1B3B6F"/>
                 </a:solidFill>
                 <a:latin typeface="Amiri" pitchFamily="2" charset="-78"/>
+                <a:ea typeface="Amiri" pitchFamily="2" charset="-78"/>
                 <a:cs typeface="Amiri" pitchFamily="2" charset="-78"/>
               </a:rPr>
               <a:t>يُوجَدُ · تُوجَدُ</a:t>
@@ -33506,6 +33728,7 @@
                   <a:srgbClr val="1B3B6F"/>
                 </a:solidFill>
                 <a:latin typeface="Amiri" pitchFamily="2" charset="-78"/>
+                <a:ea typeface="Amiri" pitchFamily="2" charset="-78"/>
                 <a:cs typeface="Amiri" pitchFamily="2" charset="-78"/>
               </a:rPr>
               <a:t>لَا يُوجَدُ</a:t>
@@ -33609,6 +33832,7 @@
                   <a:srgbClr val="1B3B6F"/>
                 </a:solidFill>
                 <a:latin typeface="Amiri" pitchFamily="2" charset="-78"/>
+                <a:ea typeface="Amiri" pitchFamily="2" charset="-78"/>
                 <a:cs typeface="Amiri" pitchFamily="2" charset="-78"/>
               </a:rPr>
               <a:t>يُوجَدُ مَتْحَفٌ</a:t>
@@ -33712,6 +33936,7 @@
                   <a:srgbClr val="1B3B6F"/>
                 </a:solidFill>
                 <a:latin typeface="Amiri" pitchFamily="2" charset="-78"/>
+                <a:ea typeface="Amiri" pitchFamily="2" charset="-78"/>
                 <a:cs typeface="Amiri" pitchFamily="2" charset="-78"/>
               </a:rPr>
               <a:t>تُوجَدُ حَدِيقَةٌ</a:t>
@@ -33977,6 +34202,7 @@
                   <a:srgbClr val="1B3B6F"/>
                 </a:solidFill>
                 <a:latin typeface="Amiri" pitchFamily="2" charset="-78"/>
+                <a:ea typeface="Amiri" pitchFamily="2" charset="-78"/>
                 <a:cs typeface="Amiri" pitchFamily="2" charset="-78"/>
               </a:rPr>
               <a:t>مَبْنًى</a:t>
@@ -34134,6 +34360,7 @@
                   <a:srgbClr val="1B3B6F"/>
                 </a:solidFill>
                 <a:latin typeface="Amiri" pitchFamily="2" charset="-78"/>
+                <a:ea typeface="Amiri" pitchFamily="2" charset="-78"/>
                 <a:cs typeface="Amiri" pitchFamily="2" charset="-78"/>
               </a:rPr>
               <a:t>مَبَانٍ عَالِيَةٌ</a:t>
@@ -34237,6 +34464,7 @@
                   <a:srgbClr val="1B3B6F"/>
                 </a:solidFill>
                 <a:latin typeface="Amiri" pitchFamily="2" charset="-78"/>
+                <a:ea typeface="Amiri" pitchFamily="2" charset="-78"/>
                 <a:cs typeface="Amiri" pitchFamily="2" charset="-78"/>
               </a:rPr>
               <a:t>مَبَانٍ · المَبَانِي</a:t>
@@ -34340,6 +34568,7 @@
                   <a:srgbClr val="1B3B6F"/>
                 </a:solidFill>
                 <a:latin typeface="Amiri" pitchFamily="2" charset="-78"/>
+                <a:ea typeface="Amiri" pitchFamily="2" charset="-78"/>
                 <a:cs typeface="Amiri" pitchFamily="2" charset="-78"/>
               </a:rPr>
               <a:t>المَبْنَى</a:t>
@@ -34605,6 +34834,7 @@
                   <a:srgbClr val="1B3B6F"/>
                 </a:solidFill>
                 <a:latin typeface="Amiri" pitchFamily="2" charset="-78"/>
+                <a:ea typeface="Amiri" pitchFamily="2" charset="-78"/>
                 <a:cs typeface="Amiri" pitchFamily="2" charset="-78"/>
               </a:rPr>
               <a:t>مُسْتَشْفًى</a:t>
@@ -34762,6 +34992,7 @@
                   <a:srgbClr val="1B3B6F"/>
                 </a:solidFill>
                 <a:latin typeface="Amiri" pitchFamily="2" charset="-78"/>
+                <a:ea typeface="Amiri" pitchFamily="2" charset="-78"/>
                 <a:cs typeface="Amiri" pitchFamily="2" charset="-78"/>
               </a:rPr>
               <a:t>مُسْتَشْفَيَاتٌ</a:t>
@@ -34865,6 +35096,7 @@
                   <a:srgbClr val="1B3B6F"/>
                 </a:solidFill>
                 <a:latin typeface="Amiri" pitchFamily="2" charset="-78"/>
+                <a:ea typeface="Amiri" pitchFamily="2" charset="-78"/>
                 <a:cs typeface="Amiri" pitchFamily="2" charset="-78"/>
               </a:rPr>
               <a:t>المُسْتَشْفَى</a:t>
@@ -35130,6 +35362,7 @@
                   <a:srgbClr val="1B3B6F"/>
                 </a:solidFill>
                 <a:latin typeface="Amiri" pitchFamily="2" charset="-78"/>
+                <a:ea typeface="Amiri" pitchFamily="2" charset="-78"/>
                 <a:cs typeface="Amiri" pitchFamily="2" charset="-78"/>
               </a:rPr>
               <a:t>مَكْتَبَةٌ عَامَّةٌ</a:t>
@@ -35287,6 +35520,7 @@
                   <a:srgbClr val="1B3B6F"/>
                 </a:solidFill>
                 <a:latin typeface="Amiri" pitchFamily="2" charset="-78"/>
+                <a:ea typeface="Amiri" pitchFamily="2" charset="-78"/>
                 <a:cs typeface="Amiri" pitchFamily="2" charset="-78"/>
               </a:rPr>
               <a:t>مَكْتَبُ البَرِيدِ</a:t>
@@ -35390,6 +35624,7 @@
                   <a:srgbClr val="1B3B6F"/>
                 </a:solidFill>
                 <a:latin typeface="Amiri" pitchFamily="2" charset="-78"/>
+                <a:ea typeface="Amiri" pitchFamily="2" charset="-78"/>
                 <a:cs typeface="Amiri" pitchFamily="2" charset="-78"/>
               </a:rPr>
               <a:t>مَكْتَبَاتٌ عَامَّةٌ</a:t>
@@ -35655,6 +35890,7 @@
                   <a:srgbClr val="1B3B6F"/>
                 </a:solidFill>
                 <a:latin typeface="Amiri" pitchFamily="2" charset="-78"/>
+                <a:ea typeface="Amiri" pitchFamily="2" charset="-78"/>
                 <a:cs typeface="Amiri" pitchFamily="2" charset="-78"/>
               </a:rPr>
               <a:t>مَرْكَزٌ تِجَارِيٌّ</a:t>
@@ -35812,6 +36048,7 @@
                   <a:srgbClr val="1B3B6F"/>
                 </a:solidFill>
                 <a:latin typeface="Amiri" pitchFamily="2" charset="-78"/>
+                <a:ea typeface="Amiri" pitchFamily="2" charset="-78"/>
                 <a:cs typeface="Amiri" pitchFamily="2" charset="-78"/>
               </a:rPr>
               <a:t>سُوقٌ · أَسْوَاقٌ</a:t>
@@ -35915,6 +36152,7 @@
                   <a:srgbClr val="1B3B6F"/>
                 </a:solidFill>
                 <a:latin typeface="Amiri" pitchFamily="2" charset="-78"/>
+                <a:ea typeface="Amiri" pitchFamily="2" charset="-78"/>
                 <a:cs typeface="Amiri" pitchFamily="2" charset="-78"/>
               </a:rPr>
               <a:t>مَرَاكِزُ تِجَارِيَّةٌ</a:t>
@@ -36180,6 +36418,7 @@
                   <a:srgbClr val="1B3B6F"/>
                 </a:solidFill>
                 <a:latin typeface="Amiri" pitchFamily="2" charset="-78"/>
+                <a:ea typeface="Amiri" pitchFamily="2" charset="-78"/>
                 <a:cs typeface="Amiri" pitchFamily="2" charset="-78"/>
               </a:rPr>
               <a:t>مَحَطَّةٌ</a:t>
@@ -36337,6 +36576,7 @@
                   <a:srgbClr val="1B3B6F"/>
                 </a:solidFill>
                 <a:latin typeface="Amiri" pitchFamily="2" charset="-78"/>
+                <a:ea typeface="Amiri" pitchFamily="2" charset="-78"/>
                 <a:cs typeface="Amiri" pitchFamily="2" charset="-78"/>
               </a:rPr>
               <a:t>مَحَطَّةُ القِطَارِ</a:t>
@@ -36440,6 +36680,7 @@
                   <a:srgbClr val="1B3B6F"/>
                 </a:solidFill>
                 <a:latin typeface="Amiri" pitchFamily="2" charset="-78"/>
+                <a:ea typeface="Amiri" pitchFamily="2" charset="-78"/>
                 <a:cs typeface="Amiri" pitchFamily="2" charset="-78"/>
               </a:rPr>
               <a:t>مَحَطَّاتٌ</a:t>
@@ -36573,6 +36814,7 @@
                   <a:srgbClr val="D4AF37"/>
                 </a:solidFill>
                 <a:latin typeface="Amiri" pitchFamily="2" charset="-78"/>
+                <a:ea typeface="Amiri" pitchFamily="2" charset="-78"/>
                 <a:cs typeface="Amiri" pitchFamily="2" charset="-78"/>
               </a:rPr>
               <a:t>م</a:t>
@@ -36893,6 +37135,7 @@
                   <a:srgbClr val="8A6D1E"/>
                 </a:solidFill>
                 <a:latin typeface="Amiri" pitchFamily="2" charset="-78"/>
+                <a:ea typeface="Amiri" pitchFamily="2" charset="-78"/>
                 <a:cs typeface="Amiri" pitchFamily="2" charset="-78"/>
               </a:rPr>
               <a:t>أَيْنَ يَقَعُ؟</a:t>
@@ -37196,6 +37439,7 @@
                   <a:srgbClr val="1B3B6F"/>
                 </a:solidFill>
                 <a:latin typeface="Amiri" pitchFamily="2" charset="-78"/>
+                <a:ea typeface="Amiri" pitchFamily="2" charset="-78"/>
                 <a:cs typeface="Amiri" pitchFamily="2" charset="-78"/>
               </a:rPr>
               <a:t>مُقَابِلَ …</a:t>
@@ -37353,6 +37597,7 @@
                   <a:srgbClr val="1B3B6F"/>
                 </a:solidFill>
                 <a:latin typeface="Amiri" pitchFamily="2" charset="-78"/>
+                <a:ea typeface="Amiri" pitchFamily="2" charset="-78"/>
                 <a:cs typeface="Amiri" pitchFamily="2" charset="-78"/>
               </a:rPr>
               <a:t>بَيْنَ … وَ…</a:t>
@@ -37456,6 +37701,7 @@
                   <a:srgbClr val="1B3B6F"/>
                 </a:solidFill>
                 <a:latin typeface="Amiri" pitchFamily="2" charset="-78"/>
+                <a:ea typeface="Amiri" pitchFamily="2" charset="-78"/>
                 <a:cs typeface="Amiri" pitchFamily="2" charset="-78"/>
               </a:rPr>
               <a:t>بِجَانِبِ</a:t>
@@ -37721,6 +37967,7 @@
                   <a:srgbClr val="1B3B6F"/>
                 </a:solidFill>
                 <a:latin typeface="Amiri" pitchFamily="2" charset="-78"/>
+                <a:ea typeface="Amiri" pitchFamily="2" charset="-78"/>
                 <a:cs typeface="Amiri" pitchFamily="2" charset="-78"/>
               </a:rPr>
               <a:t>خَلْفَ · أَمَامَ</a:t>
@@ -37878,6 +38125,7 @@
                   <a:srgbClr val="1B3B6F"/>
                 </a:solidFill>
                 <a:latin typeface="Amiri" pitchFamily="2" charset="-78"/>
+                <a:ea typeface="Amiri" pitchFamily="2" charset="-78"/>
                 <a:cs typeface="Amiri" pitchFamily="2" charset="-78"/>
               </a:rPr>
               <a:t>بَعِيدٌ عَنْ</a:t>
@@ -37981,6 +38229,7 @@
                   <a:srgbClr val="1B3B6F"/>
                 </a:solidFill>
                 <a:latin typeface="Amiri" pitchFamily="2" charset="-78"/>
+                <a:ea typeface="Amiri" pitchFamily="2" charset="-78"/>
                 <a:cs typeface="Amiri" pitchFamily="2" charset="-78"/>
               </a:rPr>
               <a:t>قُرْبَ</a:t>
@@ -38246,6 +38495,7 @@
                   <a:srgbClr val="1B3B6F"/>
                 </a:solidFill>
                 <a:latin typeface="Amiri" pitchFamily="2" charset="-78"/>
+                <a:ea typeface="Amiri" pitchFamily="2" charset="-78"/>
                 <a:cs typeface="Amiri" pitchFamily="2" charset="-78"/>
               </a:rPr>
               <a:t>حَيٌّ</a:t>
@@ -38403,6 +38653,7 @@
                   <a:srgbClr val="1B3B6F"/>
                 </a:solidFill>
                 <a:latin typeface="Amiri" pitchFamily="2" charset="-78"/>
+                <a:ea typeface="Amiri" pitchFamily="2" charset="-78"/>
                 <a:cs typeface="Amiri" pitchFamily="2" charset="-78"/>
               </a:rPr>
               <a:t>حَيٌّ سَكَنِيٌّ</a:t>
@@ -38506,6 +38757,7 @@
                   <a:srgbClr val="1B3B6F"/>
                 </a:solidFill>
                 <a:latin typeface="Amiri" pitchFamily="2" charset="-78"/>
+                <a:ea typeface="Amiri" pitchFamily="2" charset="-78"/>
                 <a:cs typeface="Amiri" pitchFamily="2" charset="-78"/>
               </a:rPr>
               <a:t>أَحْيَاءٌ</a:t>
@@ -38771,6 +39023,7 @@
                   <a:srgbClr val="1B3B6F"/>
                 </a:solidFill>
                 <a:latin typeface="Amiri" pitchFamily="2" charset="-78"/>
+                <a:ea typeface="Amiri" pitchFamily="2" charset="-78"/>
                 <a:cs typeface="Amiri" pitchFamily="2" charset="-78"/>
               </a:rPr>
               <a:t>مُزْدَحِمٌ · هَادِئٌ</a:t>
@@ -38928,6 +39181,7 @@
                   <a:srgbClr val="1B3B6F"/>
                 </a:solidFill>
                 <a:latin typeface="Amiri" pitchFamily="2" charset="-78"/>
+                <a:ea typeface="Amiri" pitchFamily="2" charset="-78"/>
                 <a:cs typeface="Amiri" pitchFamily="2" charset="-78"/>
               </a:rPr>
               <a:t>أَكْثَرُ ازْدِحَامًا · أَهْدَأُ</a:t>
@@ -39031,6 +39285,7 @@
                   <a:srgbClr val="1B3B6F"/>
                 </a:solidFill>
                 <a:latin typeface="Amiri" pitchFamily="2" charset="-78"/>
+                <a:ea typeface="Amiri" pitchFamily="2" charset="-78"/>
                 <a:cs typeface="Amiri" pitchFamily="2" charset="-78"/>
               </a:rPr>
               <a:t>مُزْدَحِمَةٌ · هَادِئَةٌ</a:t>
@@ -39296,6 +39551,7 @@
                   <a:srgbClr val="1B3B6F"/>
                 </a:solidFill>
                 <a:latin typeface="Amiri" pitchFamily="2" charset="-78"/>
+                <a:ea typeface="Amiri" pitchFamily="2" charset="-78"/>
                 <a:cs typeface="Amiri" pitchFamily="2" charset="-78"/>
               </a:rPr>
               <a:t>مَبْنِيٌّ مِنْ …</a:t>
@@ -39453,6 +39709,7 @@
                   <a:srgbClr val="1B3B6F"/>
                 </a:solidFill>
                 <a:latin typeface="Amiri" pitchFamily="2" charset="-78"/>
+                <a:ea typeface="Amiri" pitchFamily="2" charset="-78"/>
                 <a:cs typeface="Amiri" pitchFamily="2" charset="-78"/>
               </a:rPr>
               <a:t>الحَجَرُ · الطُّوبُ · الزُّجَاجُ</a:t>
@@ -39556,6 +39813,7 @@
                   <a:srgbClr val="1B3B6F"/>
                 </a:solidFill>
                 <a:latin typeface="Amiri" pitchFamily="2" charset="-78"/>
+                <a:ea typeface="Amiri" pitchFamily="2" charset="-78"/>
                 <a:cs typeface="Amiri" pitchFamily="2" charset="-78"/>
               </a:rPr>
               <a:t>مَبْنِيَّةٌ مِنْ</a:t>
@@ -39821,6 +40079,7 @@
                   <a:srgbClr val="1B3B6F"/>
                 </a:solidFill>
                 <a:latin typeface="Amiri" pitchFamily="2" charset="-78"/>
+                <a:ea typeface="Amiri" pitchFamily="2" charset="-78"/>
                 <a:cs typeface="Amiri" pitchFamily="2" charset="-78"/>
               </a:rPr>
               <a:t>خِدْمَاتٌ</a:t>
@@ -39978,6 +40237,7 @@
                   <a:srgbClr val="1B3B6F"/>
                 </a:solidFill>
                 <a:latin typeface="Amiri" pitchFamily="2" charset="-78"/>
+                <a:ea typeface="Amiri" pitchFamily="2" charset="-78"/>
                 <a:cs typeface="Amiri" pitchFamily="2" charset="-78"/>
               </a:rPr>
               <a:t>المُوَاصَلَاتُ</a:t>
@@ -40081,6 +40341,7 @@
                   <a:srgbClr val="1B3B6F"/>
                 </a:solidFill>
                 <a:latin typeface="Amiri" pitchFamily="2" charset="-78"/>
+                <a:ea typeface="Amiri" pitchFamily="2" charset="-78"/>
                 <a:cs typeface="Amiri" pitchFamily="2" charset="-78"/>
               </a:rPr>
               <a:t>خِدْمَاتٌ عَامَّةٌ</a:t>
@@ -40184,6 +40445,7 @@
                   <a:srgbClr val="1B3B6F"/>
                 </a:solidFill>
                 <a:latin typeface="Amiri" pitchFamily="2" charset="-78"/>
+                <a:ea typeface="Amiri" pitchFamily="2" charset="-78"/>
                 <a:cs typeface="Amiri" pitchFamily="2" charset="-78"/>
               </a:rPr>
               <a:t>خِدْمَةٌ</a:t>
@@ -40317,6 +40579,7 @@
                   <a:srgbClr val="D4AF37"/>
                 </a:solidFill>
                 <a:latin typeface="Amiri" pitchFamily="2" charset="-78"/>
+                <a:ea typeface="Amiri" pitchFamily="2" charset="-78"/>
                 <a:cs typeface="Amiri" pitchFamily="2" charset="-78"/>
               </a:rPr>
               <a:t>م</a:t>
@@ -40637,6 +40900,7 @@
                   <a:srgbClr val="8A6D1E"/>
                 </a:solidFill>
                 <a:latin typeface="Amiri" pitchFamily="2" charset="-78"/>
+                <a:ea typeface="Amiri" pitchFamily="2" charset="-78"/>
                 <a:cs typeface="Amiri" pitchFamily="2" charset="-78"/>
               </a:rPr>
               <a:t>فِي الغُرَفِ</a:t>
@@ -41813,6 +42077,7 @@
                   <a:srgbClr val="1B3B6F"/>
                 </a:solidFill>
                 <a:latin typeface="Amiri" pitchFamily="2" charset="-78"/>
+                <a:ea typeface="Amiri" pitchFamily="2" charset="-78"/>
                 <a:cs typeface="Amiri" pitchFamily="2" charset="-78"/>
               </a:rPr>
               <a:t>دَوْرُكَ!</a:t>
@@ -41889,6 +42154,7 @@
                   <a:srgbClr val="1B3B6F"/>
                 </a:solidFill>
                 <a:latin typeface="Amiri" pitchFamily="2" charset="-78"/>
+                <a:ea typeface="Amiri" pitchFamily="2" charset="-78"/>
                 <a:cs typeface="Amiri" pitchFamily="2" charset="-78"/>
               </a:rPr>
               <a:t>أَحْسَنْتَ! / أَحْسَنْتِ!</a:t>
@@ -41965,6 +42231,7 @@
                   <a:srgbClr val="1B3B6F"/>
                 </a:solidFill>
                 <a:latin typeface="Amiri" pitchFamily="2" charset="-78"/>
+                <a:ea typeface="Amiri" pitchFamily="2" charset="-78"/>
                 <a:cs typeface="Amiri" pitchFamily="2" charset="-78"/>
               </a:rPr>
               <a:t>تَكَلَّمْ أَكْثَرَ، مِنْ فَضْلِكَ</a:t>
@@ -42041,6 +42308,7 @@
                   <a:srgbClr val="1B3B6F"/>
                 </a:solidFill>
                 <a:latin typeface="Amiri" pitchFamily="2" charset="-78"/>
+                <a:ea typeface="Amiri" pitchFamily="2" charset="-78"/>
                 <a:cs typeface="Amiri" pitchFamily="2" charset="-78"/>
               </a:rPr>
               <a:t>لِمَاذَا؟</a:t>
@@ -42212,6 +42480,7 @@
                   <a:srgbClr val="D4AF37"/>
                 </a:solidFill>
                 <a:latin typeface="Amiri" pitchFamily="2" charset="-78"/>
+                <a:ea typeface="Amiri" pitchFamily="2" charset="-78"/>
                 <a:cs typeface="Amiri" pitchFamily="2" charset="-78"/>
               </a:rPr>
               <a:t>م</a:t>
@@ -42532,6 +42801,7 @@
                   <a:srgbClr val="8A6D1E"/>
                 </a:solidFill>
                 <a:latin typeface="Amiri" pitchFamily="2" charset="-78"/>
+                <a:ea typeface="Amiri" pitchFamily="2" charset="-78"/>
                 <a:cs typeface="Amiri" pitchFamily="2" charset="-78"/>
               </a:rPr>
               <a:t>السُّؤَالُ عَنِ الطَّرِيقِ</a:t>
@@ -42812,6 +43082,7 @@
                   <a:srgbClr val="1B3B6F"/>
                 </a:solidFill>
                 <a:latin typeface="Amiri" pitchFamily="2" charset="-78"/>
+                <a:ea typeface="Amiri" pitchFamily="2" charset="-78"/>
                 <a:cs typeface="Amiri" pitchFamily="2" charset="-78"/>
               </a:rPr>
               <a:t>مِنْ فَضْلِكَ، أَيْنَ …؟</a:t>
@@ -42888,6 +43159,7 @@
                   <a:srgbClr val="1B3B6F"/>
                 </a:solidFill>
                 <a:latin typeface="Amiri" pitchFamily="2" charset="-78"/>
+                <a:ea typeface="Amiri" pitchFamily="2" charset="-78"/>
                 <a:cs typeface="Amiri" pitchFamily="2" charset="-78"/>
               </a:rPr>
               <a:t>نَعَمْ؟ هَلْ أُسَاعِدُكَ؟</a:t>
@@ -43056,6 +43328,7 @@
                   <a:srgbClr val="1B3B6F"/>
                 </a:solidFill>
                 <a:latin typeface="Amiri" pitchFamily="2" charset="-78"/>
+                <a:ea typeface="Amiri" pitchFamily="2" charset="-78"/>
                 <a:cs typeface="Amiri" pitchFamily="2" charset="-78"/>
               </a:rPr>
               <a:t>هَلْ هُوَ …؟</a:t>
@@ -43132,6 +43405,7 @@
                   <a:srgbClr val="1B3B6F"/>
                 </a:solidFill>
                 <a:latin typeface="Amiri" pitchFamily="2" charset="-78"/>
+                <a:ea typeface="Amiri" pitchFamily="2" charset="-78"/>
                 <a:cs typeface="Amiri" pitchFamily="2" charset="-78"/>
               </a:rPr>
               <a:t>المَتْحَفُ مُقَابِلَ المَحَطَّةِ.</a:t>
@@ -43300,6 +43574,7 @@
                   <a:srgbClr val="1B3B6F"/>
                 </a:solidFill>
                 <a:latin typeface="Amiri" pitchFamily="2" charset="-78"/>
+                <a:ea typeface="Amiri" pitchFamily="2" charset="-78"/>
                 <a:cs typeface="Amiri" pitchFamily="2" charset="-78"/>
               </a:rPr>
               <a:t>هَلْ يُوجَدُ … قُرْبَهُ؟</a:t>
@@ -43376,6 +43651,7 @@
                   <a:srgbClr val="1B3B6F"/>
                 </a:solidFill>
                 <a:latin typeface="Amiri" pitchFamily="2" charset="-78"/>
+                <a:ea typeface="Amiri" pitchFamily="2" charset="-78"/>
                 <a:cs typeface="Amiri" pitchFamily="2" charset="-78"/>
               </a:rPr>
               <a:t>لَا، عَشْرُ دَقَائِقَ مَشْيًا.</a:t>
@@ -43544,6 +43820,7 @@
                   <a:srgbClr val="1B3B6F"/>
                 </a:solidFill>
                 <a:latin typeface="Amiri" pitchFamily="2" charset="-78"/>
+                <a:ea typeface="Amiri" pitchFamily="2" charset="-78"/>
                 <a:cs typeface="Amiri" pitchFamily="2" charset="-78"/>
               </a:rPr>
               <a:t>شُكْرًا … أَنَا مِنْ …</a:t>
@@ -43620,6 +43897,7 @@
                   <a:srgbClr val="1B3B6F"/>
                 </a:solidFill>
                 <a:latin typeface="Amiri" pitchFamily="2" charset="-78"/>
+                <a:ea typeface="Amiri" pitchFamily="2" charset="-78"/>
                 <a:cs typeface="Amiri" pitchFamily="2" charset="-78"/>
               </a:rPr>
               <a:t>نَعَمْ، بِجَانِبِ المَتْحَفِ.</a:t>
@@ -43788,6 +44066,7 @@
                   <a:srgbClr val="1B3B6F"/>
                 </a:solidFill>
                 <a:latin typeface="Amiri" pitchFamily="2" charset="-78"/>
+                <a:ea typeface="Amiri" pitchFamily="2" charset="-78"/>
                 <a:cs typeface="Amiri" pitchFamily="2" charset="-78"/>
               </a:rPr>
               <a:t>نَعَمْ، هِيَ … وَ…</a:t>
@@ -43864,6 +44143,7 @@
                   <a:srgbClr val="1B3B6F"/>
                 </a:solidFill>
                 <a:latin typeface="Amiri" pitchFamily="2" charset="-78"/>
+                <a:ea typeface="Amiri" pitchFamily="2" charset="-78"/>
                 <a:cs typeface="Amiri" pitchFamily="2" charset="-78"/>
               </a:rPr>
               <a:t>هَلْ تُعْجِبُكَ مَدِينَتُنَا؟</a:t>
@@ -44138,6 +44418,7 @@
                   <a:srgbClr val="D4AF37"/>
                 </a:solidFill>
                 <a:latin typeface="Amiri" pitchFamily="2" charset="-78"/>
+                <a:ea typeface="Amiri" pitchFamily="2" charset="-78"/>
                 <a:cs typeface="Amiri" pitchFamily="2" charset="-78"/>
               </a:rPr>
               <a:t>م</a:t>
@@ -44458,6 +44739,7 @@
                   <a:srgbClr val="8A6D1E"/>
                 </a:solidFill>
                 <a:latin typeface="Amiri" pitchFamily="2" charset="-78"/>
+                <a:ea typeface="Amiri" pitchFamily="2" charset="-78"/>
                 <a:cs typeface="Amiri" pitchFamily="2" charset="-78"/>
               </a:rPr>
               <a:t>فِي مَكْتَبِ السِّيَاحَةِ</a:t>
@@ -44738,6 +45020,7 @@
                   <a:srgbClr val="1B3B6F"/>
                 </a:solidFill>
                 <a:latin typeface="Amiri" pitchFamily="2" charset="-78"/>
+                <a:ea typeface="Amiri" pitchFamily="2" charset="-78"/>
                 <a:cs typeface="Amiri" pitchFamily="2" charset="-78"/>
               </a:rPr>
               <a:t>أُحِبُّ أَنْ أَزُورَ … وَ…</a:t>
@@ -44814,6 +45097,7 @@
                   <a:srgbClr val="1B3B6F"/>
                 </a:solidFill>
                 <a:latin typeface="Amiri" pitchFamily="2" charset="-78"/>
+                <a:ea typeface="Amiri" pitchFamily="2" charset="-78"/>
                 <a:cs typeface="Amiri" pitchFamily="2" charset="-78"/>
               </a:rPr>
               <a:t>أَهْلًا وَسَهْلًا! مَاذَا تُحِبُّ أَنْ تَزُورَ؟</a:t>
@@ -44982,6 +45266,7 @@
                   <a:srgbClr val="1B3B6F"/>
                 </a:solidFill>
                 <a:latin typeface="Amiri" pitchFamily="2" charset="-78"/>
+                <a:ea typeface="Amiri" pitchFamily="2" charset="-78"/>
                 <a:cs typeface="Amiri" pitchFamily="2" charset="-78"/>
               </a:rPr>
               <a:t>كَيْفَ أَصِلُ …؟</a:t>
@@ -45058,6 +45343,7 @@
                   <a:srgbClr val="1B3B6F"/>
                 </a:solidFill>
                 <a:latin typeface="Amiri" pitchFamily="2" charset="-78"/>
+                <a:ea typeface="Amiri" pitchFamily="2" charset="-78"/>
                 <a:cs typeface="Amiri" pitchFamily="2" charset="-78"/>
               </a:rPr>
               <a:t>القَلْعَةُ فِي وَسَطِ المَدِينَةِ.</a:t>
@@ -45226,6 +45512,7 @@
                   <a:srgbClr val="1B3B6F"/>
                 </a:solidFill>
                 <a:latin typeface="Amiri" pitchFamily="2" charset="-78"/>
+                <a:ea typeface="Amiri" pitchFamily="2" charset="-78"/>
                 <a:cs typeface="Amiri" pitchFamily="2" charset="-78"/>
               </a:rPr>
               <a:t>مَتَى تُفْتَحُ …؟</a:t>
@@ -45302,6 +45589,7 @@
                   <a:srgbClr val="1B3B6F"/>
                 </a:solidFill>
                 <a:latin typeface="Amiri" pitchFamily="2" charset="-78"/>
+                <a:ea typeface="Amiri" pitchFamily="2" charset="-78"/>
                 <a:cs typeface="Amiri" pitchFamily="2" charset="-78"/>
               </a:rPr>
               <a:t>الحَافِلَةُ رَقْمُ خَمْسَةٍ، أَمَامَ المَكْتَبِ.</a:t>
@@ -45405,6 +45693,7 @@
                   <a:srgbClr val="1B3B6F"/>
                 </a:solidFill>
                 <a:latin typeface="Amiri" pitchFamily="2" charset="-78"/>
+                <a:ea typeface="Amiri" pitchFamily="2" charset="-78"/>
                 <a:cs typeface="Amiri" pitchFamily="2" charset="-78"/>
               </a:rPr>
               <a:t>مِمَّ … مَبْنِيَّةٌ؟</a:t>
@@ -45481,6 +45770,7 @@
                   <a:srgbClr val="1B3B6F"/>
                 </a:solidFill>
                 <a:latin typeface="Amiri" pitchFamily="2" charset="-78"/>
+                <a:ea typeface="Amiri" pitchFamily="2" charset="-78"/>
                 <a:cs typeface="Amiri" pitchFamily="2" charset="-78"/>
               </a:rPr>
               <a:t>مِنَ التَّاسِعَةِ إِلَى الخَامِسَةِ. وَهِيَ مَبْنِيَّةٌ مُنْذُ أَلْفِ سَنَةٍ!</a:t>
@@ -45584,6 +45874,7 @@
                   <a:srgbClr val="1B3B6F"/>
                 </a:solidFill>
                 <a:latin typeface="Amiri" pitchFamily="2" charset="-78"/>
+                <a:ea typeface="Amiri" pitchFamily="2" charset="-78"/>
                 <a:cs typeface="Amiri" pitchFamily="2" charset="-78"/>
               </a:rPr>
               <a:t>نَعَمْ / لَا، مَدِينَتِي … مِنْ …</a:t>
@@ -45660,6 +45951,7 @@
                   <a:srgbClr val="1B3B6F"/>
                 </a:solidFill>
                 <a:latin typeface="Amiri" pitchFamily="2" charset="-78"/>
+                <a:ea typeface="Amiri" pitchFamily="2" charset="-78"/>
                 <a:cs typeface="Amiri" pitchFamily="2" charset="-78"/>
               </a:rPr>
               <a:t>هَلْ مَدِينَتُكَ أَكْبَرُ مِنْ مَدِينَتِنَا؟</a:t>
@@ -45834,13 +46126,9 @@
     <a:fontScheme name="Office">
       <a:majorFont>
         <a:latin typeface="Calibri Light" panose="020F0302020204030204"/>
-        <a:ea typeface=""/>
-        <a:cs typeface=""/>
-        <a:font script="Jpan" typeface="游ゴシック Light"/>
-        <a:font script="Hang" typeface="맑은 고딕"/>
-        <a:font script="Hans" typeface="等线 Light"/>
-        <a:font script="Hant" typeface="新細明體"/>
-        <a:font script="Arab" typeface="Times New Roman"/>
+        <a:ea typeface="Amiri" pitchFamily="2" charset="-78"/>
+        <a:cs typeface="Amiri" pitchFamily="2" charset="-78"/>
+        <a:font script="Arab" typeface="Amiri"/>
         <a:font script="Hebr" typeface="Times New Roman"/>
         <a:font script="Thai" typeface="Angsana New"/>
         <a:font script="Ethi" typeface="Nyala"/>
@@ -45886,13 +46174,9 @@
       </a:majorFont>
       <a:minorFont>
         <a:latin typeface="Calibri" panose="020F0502020204030204"/>
-        <a:ea typeface=""/>
-        <a:cs typeface=""/>
-        <a:font script="Jpan" typeface="游ゴシック"/>
-        <a:font script="Hang" typeface="맑은 고딕"/>
-        <a:font script="Hans" typeface="等线"/>
-        <a:font script="Hant" typeface="新細明體"/>
-        <a:font script="Arab" typeface="Arial"/>
+        <a:ea typeface="Amiri" pitchFamily="2" charset="-78"/>
+        <a:cs typeface="Amiri" pitchFamily="2" charset="-78"/>
+        <a:font script="Arab" typeface="Amiri"/>
         <a:font script="Hebr" typeface="Arial"/>
         <a:font script="Thai" typeface="Cordia New"/>
         <a:font script="Ethi" typeface="Nyala"/>
